--- a/UI.pptx
+++ b/UI.pptx
@@ -6,7 +6,11 @@
   </p:sldMasterIdLst>
   <p:sldIdLst>
     <p:sldId id="256" r:id="rId2"/>
-    <p:sldId id="257" r:id="rId3"/>
+    <p:sldId id="258" r:id="rId3"/>
+    <p:sldId id="259" r:id="rId4"/>
+    <p:sldId id="260" r:id="rId5"/>
+    <p:sldId id="261" r:id="rId6"/>
+    <p:sldId id="257" r:id="rId7"/>
   </p:sldIdLst>
   <p:sldSz cx="12192000" cy="6858000"/>
   <p:notesSz cx="6858000" cy="9144000"/>
@@ -260,7 +264,7 @@
           <a:p>
             <a:fld id="{FB319278-4D27-4CFE-9D56-B1AA2F1EEA35}" type="datetimeFigureOut">
               <a:rPr lang="zh-CN" altLang="en-US" smtClean="0"/>
-              <a:t>2025/10/5</a:t>
+              <a:t>2025/10/9</a:t>
             </a:fld>
             <a:endParaRPr lang="zh-CN" altLang="en-US"/>
           </a:p>
@@ -458,7 +462,7 @@
           <a:p>
             <a:fld id="{FB319278-4D27-4CFE-9D56-B1AA2F1EEA35}" type="datetimeFigureOut">
               <a:rPr lang="zh-CN" altLang="en-US" smtClean="0"/>
-              <a:t>2025/10/5</a:t>
+              <a:t>2025/10/9</a:t>
             </a:fld>
             <a:endParaRPr lang="zh-CN" altLang="en-US"/>
           </a:p>
@@ -666,7 +670,7 @@
           <a:p>
             <a:fld id="{FB319278-4D27-4CFE-9D56-B1AA2F1EEA35}" type="datetimeFigureOut">
               <a:rPr lang="zh-CN" altLang="en-US" smtClean="0"/>
-              <a:t>2025/10/5</a:t>
+              <a:t>2025/10/9</a:t>
             </a:fld>
             <a:endParaRPr lang="zh-CN" altLang="en-US"/>
           </a:p>
@@ -864,7 +868,7 @@
           <a:p>
             <a:fld id="{FB319278-4D27-4CFE-9D56-B1AA2F1EEA35}" type="datetimeFigureOut">
               <a:rPr lang="zh-CN" altLang="en-US" smtClean="0"/>
-              <a:t>2025/10/5</a:t>
+              <a:t>2025/10/9</a:t>
             </a:fld>
             <a:endParaRPr lang="zh-CN" altLang="en-US"/>
           </a:p>
@@ -1139,7 +1143,7 @@
           <a:p>
             <a:fld id="{FB319278-4D27-4CFE-9D56-B1AA2F1EEA35}" type="datetimeFigureOut">
               <a:rPr lang="zh-CN" altLang="en-US" smtClean="0"/>
-              <a:t>2025/10/5</a:t>
+              <a:t>2025/10/9</a:t>
             </a:fld>
             <a:endParaRPr lang="zh-CN" altLang="en-US"/>
           </a:p>
@@ -1404,7 +1408,7 @@
           <a:p>
             <a:fld id="{FB319278-4D27-4CFE-9D56-B1AA2F1EEA35}" type="datetimeFigureOut">
               <a:rPr lang="zh-CN" altLang="en-US" smtClean="0"/>
-              <a:t>2025/10/5</a:t>
+              <a:t>2025/10/9</a:t>
             </a:fld>
             <a:endParaRPr lang="zh-CN" altLang="en-US"/>
           </a:p>
@@ -1816,7 +1820,7 @@
           <a:p>
             <a:fld id="{FB319278-4D27-4CFE-9D56-B1AA2F1EEA35}" type="datetimeFigureOut">
               <a:rPr lang="zh-CN" altLang="en-US" smtClean="0"/>
-              <a:t>2025/10/5</a:t>
+              <a:t>2025/10/9</a:t>
             </a:fld>
             <a:endParaRPr lang="zh-CN" altLang="en-US"/>
           </a:p>
@@ -1957,7 +1961,7 @@
           <a:p>
             <a:fld id="{FB319278-4D27-4CFE-9D56-B1AA2F1EEA35}" type="datetimeFigureOut">
               <a:rPr lang="zh-CN" altLang="en-US" smtClean="0"/>
-              <a:t>2025/10/5</a:t>
+              <a:t>2025/10/9</a:t>
             </a:fld>
             <a:endParaRPr lang="zh-CN" altLang="en-US"/>
           </a:p>
@@ -2070,7 +2074,7 @@
           <a:p>
             <a:fld id="{FB319278-4D27-4CFE-9D56-B1AA2F1EEA35}" type="datetimeFigureOut">
               <a:rPr lang="zh-CN" altLang="en-US" smtClean="0"/>
-              <a:t>2025/10/5</a:t>
+              <a:t>2025/10/9</a:t>
             </a:fld>
             <a:endParaRPr lang="zh-CN" altLang="en-US"/>
           </a:p>
@@ -2381,7 +2385,7 @@
           <a:p>
             <a:fld id="{FB319278-4D27-4CFE-9D56-B1AA2F1EEA35}" type="datetimeFigureOut">
               <a:rPr lang="zh-CN" altLang="en-US" smtClean="0"/>
-              <a:t>2025/10/5</a:t>
+              <a:t>2025/10/9</a:t>
             </a:fld>
             <a:endParaRPr lang="zh-CN" altLang="en-US"/>
           </a:p>
@@ -2669,7 +2673,7 @@
           <a:p>
             <a:fld id="{FB319278-4D27-4CFE-9D56-B1AA2F1EEA35}" type="datetimeFigureOut">
               <a:rPr lang="zh-CN" altLang="en-US" smtClean="0"/>
-              <a:t>2025/10/5</a:t>
+              <a:t>2025/10/9</a:t>
             </a:fld>
             <a:endParaRPr lang="zh-CN" altLang="en-US"/>
           </a:p>
@@ -2915,7 +2919,7 @@
           <a:p>
             <a:fld id="{FB319278-4D27-4CFE-9D56-B1AA2F1EEA35}" type="datetimeFigureOut">
               <a:rPr lang="zh-CN" altLang="en-US" smtClean="0"/>
-              <a:t>2025/10/5</a:t>
+              <a:t>2025/10/9</a:t>
             </a:fld>
             <a:endParaRPr lang="zh-CN" altLang="en-US"/>
           </a:p>
@@ -3658,7 +3662,7 @@
         </p:blipFill>
         <p:spPr>
           <a:xfrm>
-            <a:off x="-1634144" y="-1623087"/>
+            <a:off x="-1721942" y="-1623087"/>
             <a:ext cx="9669094" cy="6181880"/>
           </a:xfrm>
           <a:prstGeom prst="rect">
@@ -3680,7 +3684,7 @@
         </p:nvSpPr>
         <p:spPr>
           <a:xfrm>
-            <a:off x="9486977" y="4038600"/>
+            <a:off x="9476647" y="4038600"/>
             <a:ext cx="1536194" cy="1536194"/>
           </a:xfrm>
           <a:prstGeom prst="ellipse">
@@ -3733,6 +3737,71 @@
           </a:p>
         </p:txBody>
       </p:sp>
+      <p:sp>
+        <p:nvSpPr>
+          <p:cNvPr id="8" name="椭圆 7">
+            <a:extLst>
+              <a:ext uri="{FF2B5EF4-FFF2-40B4-BE49-F238E27FC236}">
+                <a16:creationId xmlns:a16="http://schemas.microsoft.com/office/drawing/2014/main" id="{D5554C6F-DBF1-44AA-A824-D85F7BABFB53}"/>
+              </a:ext>
+            </a:extLst>
+          </p:cNvPr>
+          <p:cNvSpPr/>
+          <p:nvPr/>
+        </p:nvSpPr>
+        <p:spPr>
+          <a:xfrm>
+            <a:off x="10160076" y="2075903"/>
+            <a:ext cx="1536194" cy="1536194"/>
+          </a:xfrm>
+          <a:prstGeom prst="ellipse">
+            <a:avLst/>
+          </a:prstGeom>
+          <a:gradFill flip="none" rotWithShape="1">
+            <a:gsLst>
+              <a:gs pos="70000">
+                <a:schemeClr val="bg1">
+                  <a:alpha val="0"/>
+                </a:schemeClr>
+              </a:gs>
+              <a:gs pos="11000">
+                <a:schemeClr val="bg1"/>
+              </a:gs>
+            </a:gsLst>
+            <a:path path="circle">
+              <a:fillToRect l="50000" t="50000" r="50000" b="50000"/>
+            </a:path>
+            <a:tileRect/>
+          </a:gradFill>
+          <a:ln w="50800">
+            <a:noFill/>
+          </a:ln>
+        </p:spPr>
+        <p:style>
+          <a:lnRef idx="2">
+            <a:schemeClr val="accent1">
+              <a:shade val="50000"/>
+            </a:schemeClr>
+          </a:lnRef>
+          <a:fillRef idx="1">
+            <a:schemeClr val="accent1"/>
+          </a:fillRef>
+          <a:effectRef idx="0">
+            <a:schemeClr val="accent1"/>
+          </a:effectRef>
+          <a:fontRef idx="minor">
+            <a:schemeClr val="lt1"/>
+          </a:fontRef>
+        </p:style>
+        <p:txBody>
+          <a:bodyPr rtlCol="0" anchor="ctr"/>
+          <a:lstStyle/>
+          <a:p>
+            <a:pPr algn="ctr"/>
+            <a:endParaRPr lang="zh-CN" altLang="en-US"/>
+          </a:p>
+        </p:txBody>
+      </p:sp>
     </p:spTree>
     <p:extLst>
       <p:ext uri="{BB962C8B-B14F-4D97-AF65-F5344CB8AC3E}">
@@ -3747,6 +3816,3627 @@
 </file>
 
 <file path=ppt/slides/slide2.xml><?xml version="1.0" encoding="utf-8"?>
+<p:sld xmlns:a="http://schemas.openxmlformats.org/drawingml/2006/main" xmlns:r="http://schemas.openxmlformats.org/officeDocument/2006/relationships" xmlns:p="http://schemas.openxmlformats.org/presentationml/2006/main">
+  <p:cSld>
+    <p:spTree>
+      <p:nvGrpSpPr>
+        <p:cNvPr id="1" name=""/>
+        <p:cNvGrpSpPr/>
+        <p:nvPr/>
+      </p:nvGrpSpPr>
+      <p:grpSpPr>
+        <a:xfrm>
+          <a:off x="0" y="0"/>
+          <a:ext cx="0" cy="0"/>
+          <a:chOff x="0" y="0"/>
+          <a:chExt cx="0" cy="0"/>
+        </a:xfrm>
+      </p:grpSpPr>
+      <p:sp>
+        <p:nvSpPr>
+          <p:cNvPr id="13" name="矩形: 圆角 12">
+            <a:extLst>
+              <a:ext uri="{FF2B5EF4-FFF2-40B4-BE49-F238E27FC236}">
+                <a16:creationId xmlns:a16="http://schemas.microsoft.com/office/drawing/2014/main" id="{5ACAF28B-AAD1-44E0-9C64-164E892101BF}"/>
+              </a:ext>
+            </a:extLst>
+          </p:cNvPr>
+          <p:cNvSpPr/>
+          <p:nvPr/>
+        </p:nvSpPr>
+        <p:spPr>
+          <a:xfrm>
+            <a:off x="857183" y="3104059"/>
+            <a:ext cx="4796131" cy="1029903"/>
+          </a:xfrm>
+          <a:prstGeom prst="roundRect">
+            <a:avLst>
+              <a:gd name="adj" fmla="val 4933"/>
+            </a:avLst>
+          </a:prstGeom>
+          <a:solidFill>
+            <a:schemeClr val="bg1">
+              <a:lumMod val="75000"/>
+            </a:schemeClr>
+          </a:solidFill>
+          <a:ln w="63500">
+            <a:solidFill>
+              <a:schemeClr val="bg1">
+                <a:lumMod val="85000"/>
+              </a:schemeClr>
+            </a:solidFill>
+          </a:ln>
+        </p:spPr>
+        <p:style>
+          <a:lnRef idx="2">
+            <a:schemeClr val="accent1">
+              <a:shade val="50000"/>
+            </a:schemeClr>
+          </a:lnRef>
+          <a:fillRef idx="1">
+            <a:schemeClr val="accent1"/>
+          </a:fillRef>
+          <a:effectRef idx="0">
+            <a:schemeClr val="accent1"/>
+          </a:effectRef>
+          <a:fontRef idx="minor">
+            <a:schemeClr val="lt1"/>
+          </a:fontRef>
+        </p:style>
+        <p:txBody>
+          <a:bodyPr rtlCol="0" anchor="ctr"/>
+          <a:lstStyle/>
+          <a:p>
+            <a:pPr algn="ctr"/>
+            <a:endParaRPr lang="zh-CN" altLang="en-US" dirty="0"/>
+          </a:p>
+        </p:txBody>
+      </p:sp>
+      <p:sp>
+        <p:nvSpPr>
+          <p:cNvPr id="4" name="文本框 3">
+            <a:extLst>
+              <a:ext uri="{FF2B5EF4-FFF2-40B4-BE49-F238E27FC236}">
+                <a16:creationId xmlns:a16="http://schemas.microsoft.com/office/drawing/2014/main" id="{6FB87D07-6C63-4FC8-8ED0-5301B11FAF98}"/>
+              </a:ext>
+            </a:extLst>
+          </p:cNvPr>
+          <p:cNvSpPr txBox="1"/>
+          <p:nvPr/>
+        </p:nvSpPr>
+        <p:spPr>
+          <a:xfrm>
+            <a:off x="5998574" y="658778"/>
+            <a:ext cx="5100505" cy="1200329"/>
+          </a:xfrm>
+          <a:prstGeom prst="rect">
+            <a:avLst/>
+          </a:prstGeom>
+          <a:noFill/>
+        </p:spPr>
+        <p:txBody>
+          <a:bodyPr wrap="square" rtlCol="0">
+            <a:spAutoFit/>
+          </a:bodyPr>
+          <a:lstStyle/>
+          <a:p>
+            <a:r>
+              <a:rPr lang="en-US" altLang="zh-CN" sz="7200" b="1" i="1" dirty="0">
+                <a:solidFill>
+                  <a:srgbClr val="0070C0"/>
+                </a:solidFill>
+                <a:latin typeface="Agency FB" panose="020B0503020202020204" pitchFamily="34" charset="0"/>
+              </a:rPr>
+              <a:t>Bumper</a:t>
+            </a:r>
+            <a:r>
+              <a:rPr lang="en-US" altLang="zh-CN" sz="7200" b="1" i="1" dirty="0">
+                <a:latin typeface="Agency FB" panose="020B0503020202020204" pitchFamily="34" charset="0"/>
+              </a:rPr>
+              <a:t> </a:t>
+            </a:r>
+            <a:r>
+              <a:rPr lang="en-US" altLang="zh-CN" sz="7200" b="1" i="1" dirty="0">
+                <a:solidFill>
+                  <a:srgbClr val="DE0000"/>
+                </a:solidFill>
+                <a:latin typeface="Agency FB" panose="020B0503020202020204" pitchFamily="34" charset="0"/>
+              </a:rPr>
+              <a:t>Master</a:t>
+            </a:r>
+            <a:endParaRPr lang="zh-CN" altLang="en-US" sz="7200" b="1" i="1" dirty="0">
+              <a:solidFill>
+                <a:srgbClr val="DE0000"/>
+              </a:solidFill>
+              <a:latin typeface="Agency FB" panose="020B0503020202020204" pitchFamily="34" charset="0"/>
+            </a:endParaRPr>
+          </a:p>
+        </p:txBody>
+      </p:sp>
+      <p:sp>
+        <p:nvSpPr>
+          <p:cNvPr id="8" name="文本框 7">
+            <a:extLst>
+              <a:ext uri="{FF2B5EF4-FFF2-40B4-BE49-F238E27FC236}">
+                <a16:creationId xmlns:a16="http://schemas.microsoft.com/office/drawing/2014/main" id="{DDAA589D-48AC-4DB3-8B05-F9D550705F24}"/>
+              </a:ext>
+            </a:extLst>
+          </p:cNvPr>
+          <p:cNvSpPr txBox="1"/>
+          <p:nvPr/>
+        </p:nvSpPr>
+        <p:spPr>
+          <a:xfrm>
+            <a:off x="1095458" y="3234288"/>
+            <a:ext cx="4428067" cy="769441"/>
+          </a:xfrm>
+          <a:prstGeom prst="rect">
+            <a:avLst/>
+          </a:prstGeom>
+          <a:noFill/>
+        </p:spPr>
+        <p:txBody>
+          <a:bodyPr wrap="square" rtlCol="0">
+            <a:spAutoFit/>
+          </a:bodyPr>
+          <a:lstStyle/>
+          <a:p>
+            <a:pPr algn="r"/>
+            <a:r>
+              <a:rPr lang="en-US" altLang="zh-CN" sz="4400" b="1" dirty="0">
+                <a:solidFill>
+                  <a:schemeClr val="bg1"/>
+                </a:solidFill>
+                <a:latin typeface="Agency FB" panose="020B0503020202020204" pitchFamily="34" charset="0"/>
+              </a:rPr>
+              <a:t>Two-Player Mode</a:t>
+            </a:r>
+            <a:endParaRPr lang="zh-CN" altLang="en-US" sz="4400" b="1" dirty="0">
+              <a:solidFill>
+                <a:schemeClr val="bg1"/>
+              </a:solidFill>
+              <a:latin typeface="Agency FB" panose="020B0503020202020204" pitchFamily="34" charset="0"/>
+            </a:endParaRPr>
+          </a:p>
+        </p:txBody>
+      </p:sp>
+      <p:sp>
+        <p:nvSpPr>
+          <p:cNvPr id="9" name="矩形: 圆角 8">
+            <a:extLst>
+              <a:ext uri="{FF2B5EF4-FFF2-40B4-BE49-F238E27FC236}">
+                <a16:creationId xmlns:a16="http://schemas.microsoft.com/office/drawing/2014/main" id="{0E48C3FB-41F0-4717-B7ED-7C37B7CD9070}"/>
+              </a:ext>
+            </a:extLst>
+          </p:cNvPr>
+          <p:cNvSpPr/>
+          <p:nvPr/>
+        </p:nvSpPr>
+        <p:spPr>
+          <a:xfrm>
+            <a:off x="857182" y="5084722"/>
+            <a:ext cx="4796131" cy="1029903"/>
+          </a:xfrm>
+          <a:prstGeom prst="roundRect">
+            <a:avLst>
+              <a:gd name="adj" fmla="val 7046"/>
+            </a:avLst>
+          </a:prstGeom>
+          <a:solidFill>
+            <a:srgbClr val="C00000"/>
+          </a:solidFill>
+          <a:ln w="63500">
+            <a:solidFill>
+              <a:srgbClr val="C00000"/>
+            </a:solidFill>
+          </a:ln>
+        </p:spPr>
+        <p:style>
+          <a:lnRef idx="2">
+            <a:schemeClr val="accent1">
+              <a:shade val="50000"/>
+            </a:schemeClr>
+          </a:lnRef>
+          <a:fillRef idx="1">
+            <a:schemeClr val="accent1"/>
+          </a:fillRef>
+          <a:effectRef idx="0">
+            <a:schemeClr val="accent1"/>
+          </a:effectRef>
+          <a:fontRef idx="minor">
+            <a:schemeClr val="lt1"/>
+          </a:fontRef>
+        </p:style>
+        <p:txBody>
+          <a:bodyPr rtlCol="0" anchor="ctr"/>
+          <a:lstStyle/>
+          <a:p>
+            <a:pPr algn="ctr"/>
+            <a:endParaRPr lang="zh-CN" altLang="en-US" dirty="0"/>
+          </a:p>
+        </p:txBody>
+      </p:sp>
+      <p:sp>
+        <p:nvSpPr>
+          <p:cNvPr id="10" name="文本框 9">
+            <a:extLst>
+              <a:ext uri="{FF2B5EF4-FFF2-40B4-BE49-F238E27FC236}">
+                <a16:creationId xmlns:a16="http://schemas.microsoft.com/office/drawing/2014/main" id="{8CFDAA2B-0969-4375-8139-9D92CCC4102C}"/>
+              </a:ext>
+            </a:extLst>
+          </p:cNvPr>
+          <p:cNvSpPr txBox="1"/>
+          <p:nvPr/>
+        </p:nvSpPr>
+        <p:spPr>
+          <a:xfrm>
+            <a:off x="1105504" y="5214952"/>
+            <a:ext cx="4428067" cy="769441"/>
+          </a:xfrm>
+          <a:prstGeom prst="rect">
+            <a:avLst/>
+          </a:prstGeom>
+          <a:noFill/>
+        </p:spPr>
+        <p:txBody>
+          <a:bodyPr wrap="square" rtlCol="0">
+            <a:spAutoFit/>
+          </a:bodyPr>
+          <a:lstStyle/>
+          <a:p>
+            <a:pPr algn="r"/>
+            <a:r>
+              <a:rPr lang="en-US" altLang="zh-CN" sz="4400" b="1" dirty="0">
+                <a:solidFill>
+                  <a:schemeClr val="bg1"/>
+                </a:solidFill>
+                <a:latin typeface="Agency FB" panose="020B0503020202020204" pitchFamily="34" charset="0"/>
+              </a:rPr>
+              <a:t>Single-Player Mode</a:t>
+            </a:r>
+            <a:endParaRPr lang="zh-CN" altLang="en-US" sz="4400" b="1" dirty="0">
+              <a:solidFill>
+                <a:schemeClr val="bg1"/>
+              </a:solidFill>
+              <a:latin typeface="Agency FB" panose="020B0503020202020204" pitchFamily="34" charset="0"/>
+            </a:endParaRPr>
+          </a:p>
+        </p:txBody>
+      </p:sp>
+      <p:sp>
+        <p:nvSpPr>
+          <p:cNvPr id="11" name="矩形: 圆角 10">
+            <a:extLst>
+              <a:ext uri="{FF2B5EF4-FFF2-40B4-BE49-F238E27FC236}">
+                <a16:creationId xmlns:a16="http://schemas.microsoft.com/office/drawing/2014/main" id="{212DDE7F-975A-4B5D-B0F0-938AB5C105F8}"/>
+              </a:ext>
+            </a:extLst>
+          </p:cNvPr>
+          <p:cNvSpPr/>
+          <p:nvPr/>
+        </p:nvSpPr>
+        <p:spPr>
+          <a:xfrm>
+            <a:off x="857183" y="2988243"/>
+            <a:ext cx="362017" cy="1261533"/>
+          </a:xfrm>
+          <a:prstGeom prst="roundRect">
+            <a:avLst>
+              <a:gd name="adj" fmla="val 0"/>
+            </a:avLst>
+          </a:prstGeom>
+          <a:solidFill>
+            <a:schemeClr val="bg1">
+              <a:lumMod val="75000"/>
+            </a:schemeClr>
+          </a:solidFill>
+          <a:ln w="63500">
+            <a:solidFill>
+              <a:schemeClr val="bg1">
+                <a:lumMod val="85000"/>
+              </a:schemeClr>
+            </a:solidFill>
+          </a:ln>
+        </p:spPr>
+        <p:style>
+          <a:lnRef idx="2">
+            <a:schemeClr val="accent1">
+              <a:shade val="50000"/>
+            </a:schemeClr>
+          </a:lnRef>
+          <a:fillRef idx="1">
+            <a:schemeClr val="accent1"/>
+          </a:fillRef>
+          <a:effectRef idx="0">
+            <a:schemeClr val="accent1"/>
+          </a:effectRef>
+          <a:fontRef idx="minor">
+            <a:schemeClr val="lt1"/>
+          </a:fontRef>
+        </p:style>
+        <p:txBody>
+          <a:bodyPr rtlCol="0" anchor="ctr"/>
+          <a:lstStyle/>
+          <a:p>
+            <a:pPr algn="ctr"/>
+            <a:endParaRPr lang="zh-CN" altLang="en-US" dirty="0"/>
+          </a:p>
+        </p:txBody>
+      </p:sp>
+      <p:sp>
+        <p:nvSpPr>
+          <p:cNvPr id="12" name="矩形: 圆角 11">
+            <a:extLst>
+              <a:ext uri="{FF2B5EF4-FFF2-40B4-BE49-F238E27FC236}">
+                <a16:creationId xmlns:a16="http://schemas.microsoft.com/office/drawing/2014/main" id="{D8192694-4E1B-4EB4-9B16-E860C8C87600}"/>
+              </a:ext>
+            </a:extLst>
+          </p:cNvPr>
+          <p:cNvSpPr/>
+          <p:nvPr/>
+        </p:nvSpPr>
+        <p:spPr>
+          <a:xfrm>
+            <a:off x="857182" y="4968908"/>
+            <a:ext cx="362017" cy="1261533"/>
+          </a:xfrm>
+          <a:prstGeom prst="roundRect">
+            <a:avLst>
+              <a:gd name="adj" fmla="val 0"/>
+            </a:avLst>
+          </a:prstGeom>
+          <a:solidFill>
+            <a:srgbClr val="920000"/>
+          </a:solidFill>
+          <a:ln w="63500">
+            <a:solidFill>
+              <a:srgbClr val="C00000"/>
+            </a:solidFill>
+          </a:ln>
+        </p:spPr>
+        <p:style>
+          <a:lnRef idx="2">
+            <a:schemeClr val="accent1">
+              <a:shade val="50000"/>
+            </a:schemeClr>
+          </a:lnRef>
+          <a:fillRef idx="1">
+            <a:schemeClr val="accent1"/>
+          </a:fillRef>
+          <a:effectRef idx="0">
+            <a:schemeClr val="accent1"/>
+          </a:effectRef>
+          <a:fontRef idx="minor">
+            <a:schemeClr val="lt1"/>
+          </a:fontRef>
+        </p:style>
+        <p:txBody>
+          <a:bodyPr rtlCol="0" anchor="ctr"/>
+          <a:lstStyle/>
+          <a:p>
+            <a:pPr algn="ctr"/>
+            <a:endParaRPr lang="zh-CN" altLang="en-US" dirty="0"/>
+          </a:p>
+        </p:txBody>
+      </p:sp>
+    </p:spTree>
+    <p:extLst>
+      <p:ext uri="{BB962C8B-B14F-4D97-AF65-F5344CB8AC3E}">
+        <p14:creationId xmlns:p14="http://schemas.microsoft.com/office/powerpoint/2010/main" val="2700405720"/>
+      </p:ext>
+    </p:extLst>
+  </p:cSld>
+  <p:clrMapOvr>
+    <a:masterClrMapping/>
+  </p:clrMapOvr>
+</p:sld>
+</file>
+
+<file path=ppt/slides/slide3.xml><?xml version="1.0" encoding="utf-8"?>
+<p:sld xmlns:a="http://schemas.openxmlformats.org/drawingml/2006/main" xmlns:r="http://schemas.openxmlformats.org/officeDocument/2006/relationships" xmlns:p="http://schemas.openxmlformats.org/presentationml/2006/main">
+  <p:cSld>
+    <p:bg>
+      <p:bgPr>
+        <a:solidFill>
+          <a:schemeClr val="tx1">
+            <a:lumMod val="85000"/>
+            <a:lumOff val="15000"/>
+          </a:schemeClr>
+        </a:solidFill>
+        <a:effectLst/>
+      </p:bgPr>
+    </p:bg>
+    <p:spTree>
+      <p:nvGrpSpPr>
+        <p:cNvPr id="1" name=""/>
+        <p:cNvGrpSpPr/>
+        <p:nvPr/>
+      </p:nvGrpSpPr>
+      <p:grpSpPr>
+        <a:xfrm>
+          <a:off x="0" y="0"/>
+          <a:ext cx="0" cy="0"/>
+          <a:chOff x="0" y="0"/>
+          <a:chExt cx="0" cy="0"/>
+        </a:xfrm>
+      </p:grpSpPr>
+      <p:grpSp>
+        <p:nvGrpSpPr>
+          <p:cNvPr id="58" name="组合 57">
+            <a:extLst>
+              <a:ext uri="{FF2B5EF4-FFF2-40B4-BE49-F238E27FC236}">
+                <a16:creationId xmlns:a16="http://schemas.microsoft.com/office/drawing/2014/main" id="{66AB39F6-EDD0-4103-9485-6712E636C116}"/>
+              </a:ext>
+            </a:extLst>
+          </p:cNvPr>
+          <p:cNvGrpSpPr/>
+          <p:nvPr/>
+        </p:nvGrpSpPr>
+        <p:grpSpPr>
+          <a:xfrm>
+            <a:off x="-1036860" y="1929516"/>
+            <a:ext cx="14625860" cy="3269797"/>
+            <a:chOff x="-1036860" y="1929516"/>
+            <a:chExt cx="14625860" cy="3269797"/>
+          </a:xfrm>
+        </p:grpSpPr>
+        <p:sp>
+          <p:nvSpPr>
+            <p:cNvPr id="18" name="平行四边形 17">
+              <a:extLst>
+                <a:ext uri="{FF2B5EF4-FFF2-40B4-BE49-F238E27FC236}">
+                  <a16:creationId xmlns:a16="http://schemas.microsoft.com/office/drawing/2014/main" id="{7342CF37-B902-4868-B2CD-736DABB0FE23}"/>
+                </a:ext>
+              </a:extLst>
+            </p:cNvPr>
+            <p:cNvSpPr/>
+            <p:nvPr/>
+          </p:nvSpPr>
+          <p:spPr>
+            <a:xfrm>
+              <a:off x="704206" y="1929516"/>
+              <a:ext cx="2438400" cy="3225800"/>
+            </a:xfrm>
+            <a:prstGeom prst="parallelogram">
+              <a:avLst>
+                <a:gd name="adj" fmla="val 57292"/>
+              </a:avLst>
+            </a:prstGeom>
+            <a:solidFill>
+              <a:schemeClr val="bg1">
+                <a:lumMod val="50000"/>
+              </a:schemeClr>
+            </a:solidFill>
+            <a:ln>
+              <a:noFill/>
+            </a:ln>
+          </p:spPr>
+          <p:style>
+            <a:lnRef idx="2">
+              <a:schemeClr val="accent1">
+                <a:shade val="50000"/>
+              </a:schemeClr>
+            </a:lnRef>
+            <a:fillRef idx="1">
+              <a:schemeClr val="accent1"/>
+            </a:fillRef>
+            <a:effectRef idx="0">
+              <a:schemeClr val="accent1"/>
+            </a:effectRef>
+            <a:fontRef idx="minor">
+              <a:schemeClr val="lt1"/>
+            </a:fontRef>
+          </p:style>
+          <p:txBody>
+            <a:bodyPr rtlCol="0" anchor="ctr"/>
+            <a:lstStyle/>
+            <a:p>
+              <a:pPr algn="ctr"/>
+              <a:endParaRPr lang="zh-CN" altLang="en-US"/>
+            </a:p>
+          </p:txBody>
+        </p:sp>
+        <p:sp>
+          <p:nvSpPr>
+            <p:cNvPr id="19" name="平行四边形 18">
+              <a:extLst>
+                <a:ext uri="{FF2B5EF4-FFF2-40B4-BE49-F238E27FC236}">
+                  <a16:creationId xmlns:a16="http://schemas.microsoft.com/office/drawing/2014/main" id="{ED5A557B-3964-4949-A589-8301D43F6939}"/>
+                </a:ext>
+              </a:extLst>
+            </p:cNvPr>
+            <p:cNvSpPr/>
+            <p:nvPr/>
+          </p:nvSpPr>
+          <p:spPr>
+            <a:xfrm>
+              <a:off x="2445272" y="1929516"/>
+              <a:ext cx="2438400" cy="3225800"/>
+            </a:xfrm>
+            <a:prstGeom prst="parallelogram">
+              <a:avLst>
+                <a:gd name="adj" fmla="val 57292"/>
+              </a:avLst>
+            </a:prstGeom>
+            <a:solidFill>
+              <a:schemeClr val="bg1">
+                <a:lumMod val="50000"/>
+              </a:schemeClr>
+            </a:solidFill>
+            <a:ln>
+              <a:noFill/>
+            </a:ln>
+          </p:spPr>
+          <p:style>
+            <a:lnRef idx="2">
+              <a:schemeClr val="accent1">
+                <a:shade val="50000"/>
+              </a:schemeClr>
+            </a:lnRef>
+            <a:fillRef idx="1">
+              <a:schemeClr val="accent1"/>
+            </a:fillRef>
+            <a:effectRef idx="0">
+              <a:schemeClr val="accent1"/>
+            </a:effectRef>
+            <a:fontRef idx="minor">
+              <a:schemeClr val="lt1"/>
+            </a:fontRef>
+          </p:style>
+          <p:txBody>
+            <a:bodyPr rtlCol="0" anchor="ctr"/>
+            <a:lstStyle/>
+            <a:p>
+              <a:pPr algn="ctr"/>
+              <a:endParaRPr lang="zh-CN" altLang="en-US"/>
+            </a:p>
+          </p:txBody>
+        </p:sp>
+        <p:sp>
+          <p:nvSpPr>
+            <p:cNvPr id="20" name="平行四边形 19">
+              <a:extLst>
+                <a:ext uri="{FF2B5EF4-FFF2-40B4-BE49-F238E27FC236}">
+                  <a16:creationId xmlns:a16="http://schemas.microsoft.com/office/drawing/2014/main" id="{625AD736-FE2B-458F-A4AE-6A3FC994DE5F}"/>
+                </a:ext>
+              </a:extLst>
+            </p:cNvPr>
+            <p:cNvSpPr/>
+            <p:nvPr/>
+          </p:nvSpPr>
+          <p:spPr>
+            <a:xfrm>
+              <a:off x="4186338" y="1929516"/>
+              <a:ext cx="2438400" cy="3225800"/>
+            </a:xfrm>
+            <a:prstGeom prst="parallelogram">
+              <a:avLst>
+                <a:gd name="adj" fmla="val 57292"/>
+              </a:avLst>
+            </a:prstGeom>
+            <a:solidFill>
+              <a:schemeClr val="bg1">
+                <a:lumMod val="50000"/>
+              </a:schemeClr>
+            </a:solidFill>
+            <a:ln>
+              <a:noFill/>
+            </a:ln>
+          </p:spPr>
+          <p:style>
+            <a:lnRef idx="2">
+              <a:schemeClr val="accent1">
+                <a:shade val="50000"/>
+              </a:schemeClr>
+            </a:lnRef>
+            <a:fillRef idx="1">
+              <a:schemeClr val="accent1"/>
+            </a:fillRef>
+            <a:effectRef idx="0">
+              <a:schemeClr val="accent1"/>
+            </a:effectRef>
+            <a:fontRef idx="minor">
+              <a:schemeClr val="lt1"/>
+            </a:fontRef>
+          </p:style>
+          <p:txBody>
+            <a:bodyPr rtlCol="0" anchor="ctr"/>
+            <a:lstStyle/>
+            <a:p>
+              <a:pPr algn="ctr"/>
+              <a:endParaRPr lang="zh-CN" altLang="en-US"/>
+            </a:p>
+          </p:txBody>
+        </p:sp>
+        <p:sp>
+          <p:nvSpPr>
+            <p:cNvPr id="21" name="平行四边形 20">
+              <a:extLst>
+                <a:ext uri="{FF2B5EF4-FFF2-40B4-BE49-F238E27FC236}">
+                  <a16:creationId xmlns:a16="http://schemas.microsoft.com/office/drawing/2014/main" id="{00729E99-FE67-41B2-B0A9-AA9B5E6A594E}"/>
+                </a:ext>
+              </a:extLst>
+            </p:cNvPr>
+            <p:cNvSpPr/>
+            <p:nvPr/>
+          </p:nvSpPr>
+          <p:spPr>
+            <a:xfrm>
+              <a:off x="5927404" y="1929516"/>
+              <a:ext cx="2438400" cy="3225800"/>
+            </a:xfrm>
+            <a:prstGeom prst="parallelogram">
+              <a:avLst>
+                <a:gd name="adj" fmla="val 57292"/>
+              </a:avLst>
+            </a:prstGeom>
+            <a:solidFill>
+              <a:schemeClr val="bg1">
+                <a:lumMod val="50000"/>
+              </a:schemeClr>
+            </a:solidFill>
+            <a:ln>
+              <a:noFill/>
+            </a:ln>
+          </p:spPr>
+          <p:style>
+            <a:lnRef idx="2">
+              <a:schemeClr val="accent1">
+                <a:shade val="50000"/>
+              </a:schemeClr>
+            </a:lnRef>
+            <a:fillRef idx="1">
+              <a:schemeClr val="accent1"/>
+            </a:fillRef>
+            <a:effectRef idx="0">
+              <a:schemeClr val="accent1"/>
+            </a:effectRef>
+            <a:fontRef idx="minor">
+              <a:schemeClr val="lt1"/>
+            </a:fontRef>
+          </p:style>
+          <p:txBody>
+            <a:bodyPr rtlCol="0" anchor="ctr"/>
+            <a:lstStyle/>
+            <a:p>
+              <a:pPr algn="ctr"/>
+              <a:endParaRPr lang="zh-CN" altLang="en-US"/>
+            </a:p>
+          </p:txBody>
+        </p:sp>
+        <p:sp>
+          <p:nvSpPr>
+            <p:cNvPr id="22" name="平行四边形 21">
+              <a:extLst>
+                <a:ext uri="{FF2B5EF4-FFF2-40B4-BE49-F238E27FC236}">
+                  <a16:creationId xmlns:a16="http://schemas.microsoft.com/office/drawing/2014/main" id="{6E3CD790-E1A4-4149-AD78-633F728C107E}"/>
+                </a:ext>
+              </a:extLst>
+            </p:cNvPr>
+            <p:cNvSpPr/>
+            <p:nvPr/>
+          </p:nvSpPr>
+          <p:spPr>
+            <a:xfrm>
+              <a:off x="7668470" y="1929516"/>
+              <a:ext cx="2438400" cy="3225800"/>
+            </a:xfrm>
+            <a:prstGeom prst="parallelogram">
+              <a:avLst>
+                <a:gd name="adj" fmla="val 57292"/>
+              </a:avLst>
+            </a:prstGeom>
+            <a:solidFill>
+              <a:schemeClr val="bg1">
+                <a:lumMod val="50000"/>
+              </a:schemeClr>
+            </a:solidFill>
+            <a:ln>
+              <a:noFill/>
+            </a:ln>
+          </p:spPr>
+          <p:style>
+            <a:lnRef idx="2">
+              <a:schemeClr val="accent1">
+                <a:shade val="50000"/>
+              </a:schemeClr>
+            </a:lnRef>
+            <a:fillRef idx="1">
+              <a:schemeClr val="accent1"/>
+            </a:fillRef>
+            <a:effectRef idx="0">
+              <a:schemeClr val="accent1"/>
+            </a:effectRef>
+            <a:fontRef idx="minor">
+              <a:schemeClr val="lt1"/>
+            </a:fontRef>
+          </p:style>
+          <p:txBody>
+            <a:bodyPr rtlCol="0" anchor="ctr"/>
+            <a:lstStyle/>
+            <a:p>
+              <a:pPr algn="ctr"/>
+              <a:endParaRPr lang="zh-CN" altLang="en-US"/>
+            </a:p>
+          </p:txBody>
+        </p:sp>
+        <p:sp>
+          <p:nvSpPr>
+            <p:cNvPr id="23" name="平行四边形 22">
+              <a:extLst>
+                <a:ext uri="{FF2B5EF4-FFF2-40B4-BE49-F238E27FC236}">
+                  <a16:creationId xmlns:a16="http://schemas.microsoft.com/office/drawing/2014/main" id="{6B54A076-82A5-4872-8F9E-15D261863D7B}"/>
+                </a:ext>
+              </a:extLst>
+            </p:cNvPr>
+            <p:cNvSpPr/>
+            <p:nvPr/>
+          </p:nvSpPr>
+          <p:spPr>
+            <a:xfrm>
+              <a:off x="9409536" y="1929516"/>
+              <a:ext cx="2438400" cy="3225800"/>
+            </a:xfrm>
+            <a:prstGeom prst="parallelogram">
+              <a:avLst>
+                <a:gd name="adj" fmla="val 57292"/>
+              </a:avLst>
+            </a:prstGeom>
+            <a:solidFill>
+              <a:schemeClr val="bg1">
+                <a:lumMod val="50000"/>
+              </a:schemeClr>
+            </a:solidFill>
+            <a:ln>
+              <a:noFill/>
+            </a:ln>
+          </p:spPr>
+          <p:style>
+            <a:lnRef idx="2">
+              <a:schemeClr val="accent1">
+                <a:shade val="50000"/>
+              </a:schemeClr>
+            </a:lnRef>
+            <a:fillRef idx="1">
+              <a:schemeClr val="accent1"/>
+            </a:fillRef>
+            <a:effectRef idx="0">
+              <a:schemeClr val="accent1"/>
+            </a:effectRef>
+            <a:fontRef idx="minor">
+              <a:schemeClr val="lt1"/>
+            </a:fontRef>
+          </p:style>
+          <p:txBody>
+            <a:bodyPr rtlCol="0" anchor="ctr"/>
+            <a:lstStyle/>
+            <a:p>
+              <a:pPr algn="ctr"/>
+              <a:endParaRPr lang="zh-CN" altLang="en-US"/>
+            </a:p>
+          </p:txBody>
+        </p:sp>
+        <p:sp>
+          <p:nvSpPr>
+            <p:cNvPr id="29" name="平行四边形 28">
+              <a:extLst>
+                <a:ext uri="{FF2B5EF4-FFF2-40B4-BE49-F238E27FC236}">
+                  <a16:creationId xmlns:a16="http://schemas.microsoft.com/office/drawing/2014/main" id="{42A8ECA0-D0AA-47FC-A995-8187C49B6AC6}"/>
+                </a:ext>
+              </a:extLst>
+            </p:cNvPr>
+            <p:cNvSpPr/>
+            <p:nvPr/>
+          </p:nvSpPr>
+          <p:spPr>
+            <a:xfrm>
+              <a:off x="11150600" y="1929516"/>
+              <a:ext cx="2438400" cy="3225800"/>
+            </a:xfrm>
+            <a:prstGeom prst="parallelogram">
+              <a:avLst>
+                <a:gd name="adj" fmla="val 57292"/>
+              </a:avLst>
+            </a:prstGeom>
+            <a:solidFill>
+              <a:schemeClr val="bg1">
+                <a:lumMod val="50000"/>
+              </a:schemeClr>
+            </a:solidFill>
+            <a:ln>
+              <a:noFill/>
+            </a:ln>
+          </p:spPr>
+          <p:style>
+            <a:lnRef idx="2">
+              <a:schemeClr val="accent1">
+                <a:shade val="50000"/>
+              </a:schemeClr>
+            </a:lnRef>
+            <a:fillRef idx="1">
+              <a:schemeClr val="accent1"/>
+            </a:fillRef>
+            <a:effectRef idx="0">
+              <a:schemeClr val="accent1"/>
+            </a:effectRef>
+            <a:fontRef idx="minor">
+              <a:schemeClr val="lt1"/>
+            </a:fontRef>
+          </p:style>
+          <p:txBody>
+            <a:bodyPr rtlCol="0" anchor="ctr"/>
+            <a:lstStyle/>
+            <a:p>
+              <a:pPr algn="ctr"/>
+              <a:endParaRPr lang="zh-CN" altLang="en-US"/>
+            </a:p>
+          </p:txBody>
+        </p:sp>
+        <p:sp>
+          <p:nvSpPr>
+            <p:cNvPr id="32" name="平行四边形 31">
+              <a:extLst>
+                <a:ext uri="{FF2B5EF4-FFF2-40B4-BE49-F238E27FC236}">
+                  <a16:creationId xmlns:a16="http://schemas.microsoft.com/office/drawing/2014/main" id="{681FA995-6DDD-4546-9D62-E6CFB1448B42}"/>
+                </a:ext>
+              </a:extLst>
+            </p:cNvPr>
+            <p:cNvSpPr/>
+            <p:nvPr/>
+          </p:nvSpPr>
+          <p:spPr>
+            <a:xfrm>
+              <a:off x="-1036860" y="1973513"/>
+              <a:ext cx="2438400" cy="3225800"/>
+            </a:xfrm>
+            <a:prstGeom prst="parallelogram">
+              <a:avLst>
+                <a:gd name="adj" fmla="val 57292"/>
+              </a:avLst>
+            </a:prstGeom>
+            <a:solidFill>
+              <a:schemeClr val="bg1">
+                <a:lumMod val="50000"/>
+              </a:schemeClr>
+            </a:solidFill>
+            <a:ln>
+              <a:noFill/>
+            </a:ln>
+          </p:spPr>
+          <p:style>
+            <a:lnRef idx="2">
+              <a:schemeClr val="accent1">
+                <a:shade val="50000"/>
+              </a:schemeClr>
+            </a:lnRef>
+            <a:fillRef idx="1">
+              <a:schemeClr val="accent1"/>
+            </a:fillRef>
+            <a:effectRef idx="0">
+              <a:schemeClr val="accent1"/>
+            </a:effectRef>
+            <a:fontRef idx="minor">
+              <a:schemeClr val="lt1"/>
+            </a:fontRef>
+          </p:style>
+          <p:txBody>
+            <a:bodyPr rtlCol="0" anchor="ctr"/>
+            <a:lstStyle/>
+            <a:p>
+              <a:pPr algn="ctr"/>
+              <a:endParaRPr lang="zh-CN" altLang="en-US"/>
+            </a:p>
+          </p:txBody>
+        </p:sp>
+      </p:grpSp>
+      <p:grpSp>
+        <p:nvGrpSpPr>
+          <p:cNvPr id="28" name="组合 27">
+            <a:extLst>
+              <a:ext uri="{FF2B5EF4-FFF2-40B4-BE49-F238E27FC236}">
+                <a16:creationId xmlns:a16="http://schemas.microsoft.com/office/drawing/2014/main" id="{23718F76-575D-48B6-B40F-0537D0BF0354}"/>
+              </a:ext>
+            </a:extLst>
+          </p:cNvPr>
+          <p:cNvGrpSpPr/>
+          <p:nvPr/>
+        </p:nvGrpSpPr>
+        <p:grpSpPr>
+          <a:xfrm>
+            <a:off x="2327955" y="1980197"/>
+            <a:ext cx="3212432" cy="3212432"/>
+            <a:chOff x="3662796" y="1980197"/>
+            <a:chExt cx="3212432" cy="3212432"/>
+          </a:xfrm>
+        </p:grpSpPr>
+        <p:sp>
+          <p:nvSpPr>
+            <p:cNvPr id="11" name="任意多边形: 形状 10">
+              <a:extLst>
+                <a:ext uri="{FF2B5EF4-FFF2-40B4-BE49-F238E27FC236}">
+                  <a16:creationId xmlns:a16="http://schemas.microsoft.com/office/drawing/2014/main" id="{DB69C411-23B3-4EEB-BA98-18009122808F}"/>
+                </a:ext>
+              </a:extLst>
+            </p:cNvPr>
+            <p:cNvSpPr/>
+            <p:nvPr/>
+          </p:nvSpPr>
+          <p:spPr>
+            <a:xfrm rot="13500000">
+              <a:off x="3662796" y="1980197"/>
+              <a:ext cx="3212432" cy="3212432"/>
+            </a:xfrm>
+            <a:custGeom>
+              <a:avLst/>
+              <a:gdLst>
+                <a:gd name="connsiteX0" fmla="*/ 0 w 3212432"/>
+                <a:gd name="connsiteY0" fmla="*/ 0 h 3212432"/>
+                <a:gd name="connsiteX1" fmla="*/ 3212432 w 3212432"/>
+                <a:gd name="connsiteY1" fmla="*/ 0 h 3212432"/>
+                <a:gd name="connsiteX2" fmla="*/ 3212432 w 3212432"/>
+                <a:gd name="connsiteY2" fmla="*/ 3212432 h 3212432"/>
+                <a:gd name="connsiteX3" fmla="*/ 3212431 w 3212432"/>
+                <a:gd name="connsiteY3" fmla="*/ 3212432 h 3212432"/>
+                <a:gd name="connsiteX4" fmla="*/ 2624395 w 3212432"/>
+                <a:gd name="connsiteY4" fmla="*/ 2624396 h 3212432"/>
+                <a:gd name="connsiteX5" fmla="*/ 2624396 w 3212432"/>
+                <a:gd name="connsiteY5" fmla="*/ 2624396 h 3212432"/>
+                <a:gd name="connsiteX6" fmla="*/ 2624396 w 3212432"/>
+                <a:gd name="connsiteY6" fmla="*/ 588036 h 3212432"/>
+                <a:gd name="connsiteX7" fmla="*/ 588036 w 3212432"/>
+                <a:gd name="connsiteY7" fmla="*/ 588036 h 3212432"/>
+                <a:gd name="connsiteX8" fmla="*/ 588036 w 3212432"/>
+                <a:gd name="connsiteY8" fmla="*/ 588037 h 3212432"/>
+                <a:gd name="connsiteX9" fmla="*/ 0 w 3212432"/>
+                <a:gd name="connsiteY9" fmla="*/ 1 h 3212432"/>
+              </a:gdLst>
+              <a:ahLst/>
+              <a:cxnLst>
+                <a:cxn ang="0">
+                  <a:pos x="connsiteX0" y="connsiteY0"/>
+                </a:cxn>
+                <a:cxn ang="0">
+                  <a:pos x="connsiteX1" y="connsiteY1"/>
+                </a:cxn>
+                <a:cxn ang="0">
+                  <a:pos x="connsiteX2" y="connsiteY2"/>
+                </a:cxn>
+                <a:cxn ang="0">
+                  <a:pos x="connsiteX3" y="connsiteY3"/>
+                </a:cxn>
+                <a:cxn ang="0">
+                  <a:pos x="connsiteX4" y="connsiteY4"/>
+                </a:cxn>
+                <a:cxn ang="0">
+                  <a:pos x="connsiteX5" y="connsiteY5"/>
+                </a:cxn>
+                <a:cxn ang="0">
+                  <a:pos x="connsiteX6" y="connsiteY6"/>
+                </a:cxn>
+                <a:cxn ang="0">
+                  <a:pos x="connsiteX7" y="connsiteY7"/>
+                </a:cxn>
+                <a:cxn ang="0">
+                  <a:pos x="connsiteX8" y="connsiteY8"/>
+                </a:cxn>
+                <a:cxn ang="0">
+                  <a:pos x="connsiteX9" y="connsiteY9"/>
+                </a:cxn>
+              </a:cxnLst>
+              <a:rect l="l" t="t" r="r" b="b"/>
+              <a:pathLst>
+                <a:path w="3212432" h="3212432">
+                  <a:moveTo>
+                    <a:pt x="0" y="0"/>
+                  </a:moveTo>
+                  <a:lnTo>
+                    <a:pt x="3212432" y="0"/>
+                  </a:lnTo>
+                  <a:lnTo>
+                    <a:pt x="3212432" y="3212432"/>
+                  </a:lnTo>
+                  <a:lnTo>
+                    <a:pt x="3212431" y="3212432"/>
+                  </a:lnTo>
+                  <a:lnTo>
+                    <a:pt x="2624395" y="2624396"/>
+                  </a:lnTo>
+                  <a:lnTo>
+                    <a:pt x="2624396" y="2624396"/>
+                  </a:lnTo>
+                  <a:lnTo>
+                    <a:pt x="2624396" y="588036"/>
+                  </a:lnTo>
+                  <a:lnTo>
+                    <a:pt x="588036" y="588036"/>
+                  </a:lnTo>
+                  <a:lnTo>
+                    <a:pt x="588036" y="588037"/>
+                  </a:lnTo>
+                  <a:lnTo>
+                    <a:pt x="0" y="1"/>
+                  </a:lnTo>
+                  <a:close/>
+                </a:path>
+              </a:pathLst>
+            </a:custGeom>
+            <a:solidFill>
+              <a:schemeClr val="bg1"/>
+            </a:solidFill>
+            <a:ln>
+              <a:noFill/>
+            </a:ln>
+          </p:spPr>
+          <p:style>
+            <a:lnRef idx="2">
+              <a:schemeClr val="accent1">
+                <a:shade val="50000"/>
+              </a:schemeClr>
+            </a:lnRef>
+            <a:fillRef idx="1">
+              <a:schemeClr val="accent1"/>
+            </a:fillRef>
+            <a:effectRef idx="0">
+              <a:schemeClr val="accent1"/>
+            </a:effectRef>
+            <a:fontRef idx="minor">
+              <a:schemeClr val="lt1"/>
+            </a:fontRef>
+          </p:style>
+          <p:txBody>
+            <a:bodyPr rtlCol="0" anchor="ctr"/>
+            <a:lstStyle/>
+            <a:p>
+              <a:pPr algn="ctr"/>
+              <a:endParaRPr lang="zh-CN" altLang="en-US">
+                <a:solidFill>
+                  <a:schemeClr val="tx1"/>
+                </a:solidFill>
+              </a:endParaRPr>
+            </a:p>
+          </p:txBody>
+        </p:sp>
+        <p:sp>
+          <p:nvSpPr>
+            <p:cNvPr id="15" name="任意多边形: 形状 14">
+              <a:extLst>
+                <a:ext uri="{FF2B5EF4-FFF2-40B4-BE49-F238E27FC236}">
+                  <a16:creationId xmlns:a16="http://schemas.microsoft.com/office/drawing/2014/main" id="{FA933141-AD50-479D-A198-7F93B933C832}"/>
+                </a:ext>
+              </a:extLst>
+            </p:cNvPr>
+            <p:cNvSpPr/>
+            <p:nvPr/>
+          </p:nvSpPr>
+          <p:spPr>
+            <a:xfrm rot="13500000">
+              <a:off x="5465869" y="2912532"/>
+              <a:ext cx="1347764" cy="1347764"/>
+            </a:xfrm>
+            <a:custGeom>
+              <a:avLst/>
+              <a:gdLst>
+                <a:gd name="connsiteX0" fmla="*/ 0 w 3212432"/>
+                <a:gd name="connsiteY0" fmla="*/ 0 h 3212432"/>
+                <a:gd name="connsiteX1" fmla="*/ 3212432 w 3212432"/>
+                <a:gd name="connsiteY1" fmla="*/ 0 h 3212432"/>
+                <a:gd name="connsiteX2" fmla="*/ 3212432 w 3212432"/>
+                <a:gd name="connsiteY2" fmla="*/ 3212432 h 3212432"/>
+                <a:gd name="connsiteX3" fmla="*/ 3212431 w 3212432"/>
+                <a:gd name="connsiteY3" fmla="*/ 3212432 h 3212432"/>
+                <a:gd name="connsiteX4" fmla="*/ 2624395 w 3212432"/>
+                <a:gd name="connsiteY4" fmla="*/ 2624396 h 3212432"/>
+                <a:gd name="connsiteX5" fmla="*/ 2624396 w 3212432"/>
+                <a:gd name="connsiteY5" fmla="*/ 2624396 h 3212432"/>
+                <a:gd name="connsiteX6" fmla="*/ 2624396 w 3212432"/>
+                <a:gd name="connsiteY6" fmla="*/ 588036 h 3212432"/>
+                <a:gd name="connsiteX7" fmla="*/ 588036 w 3212432"/>
+                <a:gd name="connsiteY7" fmla="*/ 588036 h 3212432"/>
+                <a:gd name="connsiteX8" fmla="*/ 588036 w 3212432"/>
+                <a:gd name="connsiteY8" fmla="*/ 588037 h 3212432"/>
+                <a:gd name="connsiteX9" fmla="*/ 0 w 3212432"/>
+                <a:gd name="connsiteY9" fmla="*/ 1 h 3212432"/>
+              </a:gdLst>
+              <a:ahLst/>
+              <a:cxnLst>
+                <a:cxn ang="0">
+                  <a:pos x="connsiteX0" y="connsiteY0"/>
+                </a:cxn>
+                <a:cxn ang="0">
+                  <a:pos x="connsiteX1" y="connsiteY1"/>
+                </a:cxn>
+                <a:cxn ang="0">
+                  <a:pos x="connsiteX2" y="connsiteY2"/>
+                </a:cxn>
+                <a:cxn ang="0">
+                  <a:pos x="connsiteX3" y="connsiteY3"/>
+                </a:cxn>
+                <a:cxn ang="0">
+                  <a:pos x="connsiteX4" y="connsiteY4"/>
+                </a:cxn>
+                <a:cxn ang="0">
+                  <a:pos x="connsiteX5" y="connsiteY5"/>
+                </a:cxn>
+                <a:cxn ang="0">
+                  <a:pos x="connsiteX6" y="connsiteY6"/>
+                </a:cxn>
+                <a:cxn ang="0">
+                  <a:pos x="connsiteX7" y="connsiteY7"/>
+                </a:cxn>
+                <a:cxn ang="0">
+                  <a:pos x="connsiteX8" y="connsiteY8"/>
+                </a:cxn>
+                <a:cxn ang="0">
+                  <a:pos x="connsiteX9" y="connsiteY9"/>
+                </a:cxn>
+              </a:cxnLst>
+              <a:rect l="l" t="t" r="r" b="b"/>
+              <a:pathLst>
+                <a:path w="3212432" h="3212432">
+                  <a:moveTo>
+                    <a:pt x="0" y="0"/>
+                  </a:moveTo>
+                  <a:lnTo>
+                    <a:pt x="3212432" y="0"/>
+                  </a:lnTo>
+                  <a:lnTo>
+                    <a:pt x="3212432" y="3212432"/>
+                  </a:lnTo>
+                  <a:lnTo>
+                    <a:pt x="3212431" y="3212432"/>
+                  </a:lnTo>
+                  <a:lnTo>
+                    <a:pt x="2624395" y="2624396"/>
+                  </a:lnTo>
+                  <a:lnTo>
+                    <a:pt x="2624396" y="2624396"/>
+                  </a:lnTo>
+                  <a:lnTo>
+                    <a:pt x="2624396" y="588036"/>
+                  </a:lnTo>
+                  <a:lnTo>
+                    <a:pt x="588036" y="588036"/>
+                  </a:lnTo>
+                  <a:lnTo>
+                    <a:pt x="588036" y="588037"/>
+                  </a:lnTo>
+                  <a:lnTo>
+                    <a:pt x="0" y="1"/>
+                  </a:lnTo>
+                  <a:close/>
+                </a:path>
+              </a:pathLst>
+            </a:custGeom>
+            <a:solidFill>
+              <a:schemeClr val="bg1"/>
+            </a:solidFill>
+            <a:ln>
+              <a:noFill/>
+            </a:ln>
+          </p:spPr>
+          <p:style>
+            <a:lnRef idx="2">
+              <a:schemeClr val="accent1">
+                <a:shade val="50000"/>
+              </a:schemeClr>
+            </a:lnRef>
+            <a:fillRef idx="1">
+              <a:schemeClr val="accent1"/>
+            </a:fillRef>
+            <a:effectRef idx="0">
+              <a:schemeClr val="accent1"/>
+            </a:effectRef>
+            <a:fontRef idx="minor">
+              <a:schemeClr val="lt1"/>
+            </a:fontRef>
+          </p:style>
+          <p:txBody>
+            <a:bodyPr rtlCol="0" anchor="ctr"/>
+            <a:lstStyle/>
+            <a:p>
+              <a:pPr algn="ctr"/>
+              <a:endParaRPr lang="zh-CN" altLang="en-US">
+                <a:solidFill>
+                  <a:schemeClr val="tx1"/>
+                </a:solidFill>
+              </a:endParaRPr>
+            </a:p>
+          </p:txBody>
+        </p:sp>
+      </p:grpSp>
+      <p:pic>
+        <p:nvPicPr>
+          <p:cNvPr id="57" name="图片 56">
+            <a:extLst>
+              <a:ext uri="{FF2B5EF4-FFF2-40B4-BE49-F238E27FC236}">
+                <a16:creationId xmlns:a16="http://schemas.microsoft.com/office/drawing/2014/main" id="{8E5A6D7C-D02B-47DB-9C45-6663C52519A2}"/>
+              </a:ext>
+            </a:extLst>
+          </p:cNvPr>
+          <p:cNvPicPr>
+            <a:picLocks noChangeAspect="1"/>
+          </p:cNvPicPr>
+          <p:nvPr/>
+        </p:nvPicPr>
+        <p:blipFill rotWithShape="1">
+          <a:blip r:embed="rId2">
+            <a:extLst>
+              <a:ext uri="{BEBA8EAE-BF5A-486C-A8C5-ECC9F3942E4B}">
+                <a14:imgProps xmlns:a14="http://schemas.microsoft.com/office/drawing/2010/main">
+                  <a14:imgLayer r:embed="rId3">
+                    <a14:imgEffect>
+                      <a14:brightnessContrast bright="-10000"/>
+                    </a14:imgEffect>
+                  </a14:imgLayer>
+                </a14:imgProps>
+              </a:ext>
+            </a:extLst>
+          </a:blip>
+          <a:srcRect l="7089" r="9551"/>
+          <a:stretch/>
+        </p:blipFill>
+        <p:spPr>
+          <a:xfrm>
+            <a:off x="177800" y="-633848"/>
+            <a:ext cx="12192000" cy="3267804"/>
+          </a:xfrm>
+          <a:prstGeom prst="rect">
+            <a:avLst/>
+          </a:prstGeom>
+        </p:spPr>
+      </p:pic>
+    </p:spTree>
+    <p:extLst>
+      <p:ext uri="{BB962C8B-B14F-4D97-AF65-F5344CB8AC3E}">
+        <p14:creationId xmlns:p14="http://schemas.microsoft.com/office/powerpoint/2010/main" val="1536664288"/>
+      </p:ext>
+    </p:extLst>
+  </p:cSld>
+  <p:clrMapOvr>
+    <a:masterClrMapping/>
+  </p:clrMapOvr>
+</p:sld>
+</file>
+
+<file path=ppt/slides/slide4.xml><?xml version="1.0" encoding="utf-8"?>
+<p:sld xmlns:a="http://schemas.openxmlformats.org/drawingml/2006/main" xmlns:r="http://schemas.openxmlformats.org/officeDocument/2006/relationships" xmlns:p="http://schemas.openxmlformats.org/presentationml/2006/main">
+  <p:cSld>
+    <p:spTree>
+      <p:nvGrpSpPr>
+        <p:cNvPr id="1" name=""/>
+        <p:cNvGrpSpPr/>
+        <p:nvPr/>
+      </p:nvGrpSpPr>
+      <p:grpSpPr>
+        <a:xfrm>
+          <a:off x="0" y="0"/>
+          <a:ext cx="0" cy="0"/>
+          <a:chOff x="0" y="0"/>
+          <a:chExt cx="0" cy="0"/>
+        </a:xfrm>
+      </p:grpSpPr>
+      <p:sp>
+        <p:nvSpPr>
+          <p:cNvPr id="8" name="矩形: 圆角 7">
+            <a:extLst>
+              <a:ext uri="{FF2B5EF4-FFF2-40B4-BE49-F238E27FC236}">
+                <a16:creationId xmlns:a16="http://schemas.microsoft.com/office/drawing/2014/main" id="{51F4C0B1-E829-4F9B-88E6-1ECE28F16096}"/>
+              </a:ext>
+            </a:extLst>
+          </p:cNvPr>
+          <p:cNvSpPr/>
+          <p:nvPr/>
+        </p:nvSpPr>
+        <p:spPr>
+          <a:xfrm>
+            <a:off x="2188027" y="1618343"/>
+            <a:ext cx="2801257" cy="3069772"/>
+          </a:xfrm>
+          <a:prstGeom prst="roundRect">
+            <a:avLst>
+              <a:gd name="adj" fmla="val 5009"/>
+            </a:avLst>
+          </a:prstGeom>
+          <a:solidFill>
+            <a:srgbClr val="004692"/>
+          </a:solidFill>
+          <a:ln w="44450">
+            <a:solidFill>
+              <a:srgbClr val="00B0F0"/>
+            </a:solidFill>
+          </a:ln>
+        </p:spPr>
+        <p:style>
+          <a:lnRef idx="2">
+            <a:schemeClr val="accent1">
+              <a:shade val="50000"/>
+            </a:schemeClr>
+          </a:lnRef>
+          <a:fillRef idx="1">
+            <a:schemeClr val="accent1"/>
+          </a:fillRef>
+          <a:effectRef idx="0">
+            <a:schemeClr val="accent1"/>
+          </a:effectRef>
+          <a:fontRef idx="minor">
+            <a:schemeClr val="lt1"/>
+          </a:fontRef>
+        </p:style>
+        <p:txBody>
+          <a:bodyPr rtlCol="0" anchor="ctr"/>
+          <a:lstStyle/>
+          <a:p>
+            <a:pPr algn="ctr"/>
+            <a:endParaRPr lang="zh-CN" altLang="en-US"/>
+          </a:p>
+        </p:txBody>
+      </p:sp>
+      <p:grpSp>
+        <p:nvGrpSpPr>
+          <p:cNvPr id="10" name="组合 9">
+            <a:extLst>
+              <a:ext uri="{FF2B5EF4-FFF2-40B4-BE49-F238E27FC236}">
+                <a16:creationId xmlns:a16="http://schemas.microsoft.com/office/drawing/2014/main" id="{19B17421-03AB-4F33-B664-C25FA5994F7C}"/>
+              </a:ext>
+            </a:extLst>
+          </p:cNvPr>
+          <p:cNvGrpSpPr/>
+          <p:nvPr/>
+        </p:nvGrpSpPr>
+        <p:grpSpPr>
+          <a:xfrm>
+            <a:off x="2913741" y="2086428"/>
+            <a:ext cx="1349830" cy="1458686"/>
+            <a:chOff x="2913741" y="1970314"/>
+            <a:chExt cx="1349830" cy="1458686"/>
+          </a:xfrm>
+        </p:grpSpPr>
+        <p:sp>
+          <p:nvSpPr>
+            <p:cNvPr id="4" name="椭圆 3">
+              <a:extLst>
+                <a:ext uri="{FF2B5EF4-FFF2-40B4-BE49-F238E27FC236}">
+                  <a16:creationId xmlns:a16="http://schemas.microsoft.com/office/drawing/2014/main" id="{D6811C3E-C9DB-4C62-99A2-F7D14C3A7001}"/>
+                </a:ext>
+              </a:extLst>
+            </p:cNvPr>
+            <p:cNvSpPr/>
+            <p:nvPr/>
+          </p:nvSpPr>
+          <p:spPr>
+            <a:xfrm>
+              <a:off x="3287486" y="1970314"/>
+              <a:ext cx="602344" cy="602344"/>
+            </a:xfrm>
+            <a:prstGeom prst="ellipse">
+              <a:avLst/>
+            </a:prstGeom>
+            <a:solidFill>
+              <a:schemeClr val="bg1"/>
+            </a:solidFill>
+            <a:ln>
+              <a:solidFill>
+                <a:schemeClr val="tx1"/>
+              </a:solidFill>
+            </a:ln>
+          </p:spPr>
+          <p:style>
+            <a:lnRef idx="2">
+              <a:schemeClr val="accent1">
+                <a:shade val="50000"/>
+              </a:schemeClr>
+            </a:lnRef>
+            <a:fillRef idx="1">
+              <a:schemeClr val="accent1"/>
+            </a:fillRef>
+            <a:effectRef idx="0">
+              <a:schemeClr val="accent1"/>
+            </a:effectRef>
+            <a:fontRef idx="minor">
+              <a:schemeClr val="lt1"/>
+            </a:fontRef>
+          </p:style>
+          <p:txBody>
+            <a:bodyPr rtlCol="0" anchor="ctr"/>
+            <a:lstStyle/>
+            <a:p>
+              <a:pPr algn="ctr"/>
+              <a:endParaRPr lang="zh-CN" altLang="en-US"/>
+            </a:p>
+          </p:txBody>
+        </p:sp>
+        <p:sp>
+          <p:nvSpPr>
+            <p:cNvPr id="7" name="任意多边形: 形状 6">
+              <a:extLst>
+                <a:ext uri="{FF2B5EF4-FFF2-40B4-BE49-F238E27FC236}">
+                  <a16:creationId xmlns:a16="http://schemas.microsoft.com/office/drawing/2014/main" id="{B3C5AE6E-6B81-48A3-A9A8-38E1A4655BE2}"/>
+                </a:ext>
+              </a:extLst>
+            </p:cNvPr>
+            <p:cNvSpPr/>
+            <p:nvPr/>
+          </p:nvSpPr>
+          <p:spPr>
+            <a:xfrm>
+              <a:off x="2913741" y="2754086"/>
+              <a:ext cx="1349830" cy="674914"/>
+            </a:xfrm>
+            <a:custGeom>
+              <a:avLst/>
+              <a:gdLst>
+                <a:gd name="connsiteX0" fmla="*/ 674915 w 1349830"/>
+                <a:gd name="connsiteY0" fmla="*/ 0 h 674914"/>
+                <a:gd name="connsiteX1" fmla="*/ 1336118 w 1349830"/>
+                <a:gd name="connsiteY1" fmla="*/ 538896 h 674914"/>
+                <a:gd name="connsiteX2" fmla="*/ 1349830 w 1349830"/>
+                <a:gd name="connsiteY2" fmla="*/ 674914 h 674914"/>
+                <a:gd name="connsiteX3" fmla="*/ 0 w 1349830"/>
+                <a:gd name="connsiteY3" fmla="*/ 674914 h 674914"/>
+                <a:gd name="connsiteX4" fmla="*/ 13712 w 1349830"/>
+                <a:gd name="connsiteY4" fmla="*/ 538896 h 674914"/>
+                <a:gd name="connsiteX5" fmla="*/ 674915 w 1349830"/>
+                <a:gd name="connsiteY5" fmla="*/ 0 h 674914"/>
+              </a:gdLst>
+              <a:ahLst/>
+              <a:cxnLst>
+                <a:cxn ang="0">
+                  <a:pos x="connsiteX0" y="connsiteY0"/>
+                </a:cxn>
+                <a:cxn ang="0">
+                  <a:pos x="connsiteX1" y="connsiteY1"/>
+                </a:cxn>
+                <a:cxn ang="0">
+                  <a:pos x="connsiteX2" y="connsiteY2"/>
+                </a:cxn>
+                <a:cxn ang="0">
+                  <a:pos x="connsiteX3" y="connsiteY3"/>
+                </a:cxn>
+                <a:cxn ang="0">
+                  <a:pos x="connsiteX4" y="connsiteY4"/>
+                </a:cxn>
+                <a:cxn ang="0">
+                  <a:pos x="connsiteX5" y="connsiteY5"/>
+                </a:cxn>
+              </a:cxnLst>
+              <a:rect l="l" t="t" r="r" b="b"/>
+              <a:pathLst>
+                <a:path w="1349830" h="674914">
+                  <a:moveTo>
+                    <a:pt x="674915" y="0"/>
+                  </a:moveTo>
+                  <a:cubicBezTo>
+                    <a:pt x="1001067" y="0"/>
+                    <a:pt x="1273185" y="231349"/>
+                    <a:pt x="1336118" y="538896"/>
+                  </a:cubicBezTo>
+                  <a:lnTo>
+                    <a:pt x="1349830" y="674914"/>
+                  </a:lnTo>
+                  <a:lnTo>
+                    <a:pt x="0" y="674914"/>
+                  </a:lnTo>
+                  <a:lnTo>
+                    <a:pt x="13712" y="538896"/>
+                  </a:lnTo>
+                  <a:cubicBezTo>
+                    <a:pt x="76645" y="231349"/>
+                    <a:pt x="348763" y="0"/>
+                    <a:pt x="674915" y="0"/>
+                  </a:cubicBezTo>
+                  <a:close/>
+                </a:path>
+              </a:pathLst>
+            </a:custGeom>
+            <a:solidFill>
+              <a:schemeClr val="bg1"/>
+            </a:solidFill>
+            <a:ln>
+              <a:solidFill>
+                <a:schemeClr val="tx1"/>
+              </a:solidFill>
+            </a:ln>
+          </p:spPr>
+          <p:style>
+            <a:lnRef idx="2">
+              <a:schemeClr val="accent1">
+                <a:shade val="50000"/>
+              </a:schemeClr>
+            </a:lnRef>
+            <a:fillRef idx="1">
+              <a:schemeClr val="accent1"/>
+            </a:fillRef>
+            <a:effectRef idx="0">
+              <a:schemeClr val="accent1"/>
+            </a:effectRef>
+            <a:fontRef idx="minor">
+              <a:schemeClr val="lt1"/>
+            </a:fontRef>
+          </p:style>
+          <p:txBody>
+            <a:bodyPr wrap="square" rtlCol="0" anchor="ctr">
+              <a:noAutofit/>
+            </a:bodyPr>
+            <a:lstStyle/>
+            <a:p>
+              <a:pPr algn="ctr"/>
+              <a:endParaRPr lang="zh-CN" altLang="en-US"/>
+            </a:p>
+          </p:txBody>
+        </p:sp>
+      </p:grpSp>
+      <p:sp>
+        <p:nvSpPr>
+          <p:cNvPr id="9" name="文本框 8">
+            <a:extLst>
+              <a:ext uri="{FF2B5EF4-FFF2-40B4-BE49-F238E27FC236}">
+                <a16:creationId xmlns:a16="http://schemas.microsoft.com/office/drawing/2014/main" id="{7A023C47-A688-48DD-A588-395EF41B9C6F}"/>
+              </a:ext>
+            </a:extLst>
+          </p:cNvPr>
+          <p:cNvSpPr txBox="1"/>
+          <p:nvPr/>
+        </p:nvSpPr>
+        <p:spPr>
+          <a:xfrm>
+            <a:off x="2438396" y="3852876"/>
+            <a:ext cx="2300518" cy="646331"/>
+          </a:xfrm>
+          <a:prstGeom prst="rect">
+            <a:avLst/>
+          </a:prstGeom>
+          <a:noFill/>
+        </p:spPr>
+        <p:txBody>
+          <a:bodyPr wrap="square" rtlCol="0">
+            <a:spAutoFit/>
+          </a:bodyPr>
+          <a:lstStyle/>
+          <a:p>
+            <a:pPr algn="ctr"/>
+            <a:r>
+              <a:rPr lang="en-US" altLang="zh-CN" sz="3600" b="1" dirty="0">
+                <a:solidFill>
+                  <a:schemeClr val="bg1"/>
+                </a:solidFill>
+                <a:latin typeface="Agency FB" panose="020B0503020202020204" pitchFamily="34" charset="0"/>
+              </a:rPr>
+              <a:t>Single Player</a:t>
+            </a:r>
+            <a:endParaRPr lang="zh-CN" altLang="en-US" sz="3600" b="1" dirty="0">
+              <a:solidFill>
+                <a:schemeClr val="bg1"/>
+              </a:solidFill>
+              <a:latin typeface="Agency FB" panose="020B0503020202020204" pitchFamily="34" charset="0"/>
+            </a:endParaRPr>
+          </a:p>
+        </p:txBody>
+      </p:sp>
+      <p:sp>
+        <p:nvSpPr>
+          <p:cNvPr id="11" name="矩形: 圆角 10">
+            <a:extLst>
+              <a:ext uri="{FF2B5EF4-FFF2-40B4-BE49-F238E27FC236}">
+                <a16:creationId xmlns:a16="http://schemas.microsoft.com/office/drawing/2014/main" id="{F845AAEC-E483-46EB-B372-EE6CCB854E0E}"/>
+              </a:ext>
+            </a:extLst>
+          </p:cNvPr>
+          <p:cNvSpPr/>
+          <p:nvPr/>
+        </p:nvSpPr>
+        <p:spPr>
+          <a:xfrm>
+            <a:off x="6444339" y="1618343"/>
+            <a:ext cx="2801257" cy="3069772"/>
+          </a:xfrm>
+          <a:prstGeom prst="roundRect">
+            <a:avLst>
+              <a:gd name="adj" fmla="val 5009"/>
+            </a:avLst>
+          </a:prstGeom>
+          <a:solidFill>
+            <a:srgbClr val="920000"/>
+          </a:solidFill>
+          <a:ln w="44450">
+            <a:solidFill>
+              <a:srgbClr val="FF0000"/>
+            </a:solidFill>
+          </a:ln>
+        </p:spPr>
+        <p:style>
+          <a:lnRef idx="2">
+            <a:schemeClr val="accent1">
+              <a:shade val="50000"/>
+            </a:schemeClr>
+          </a:lnRef>
+          <a:fillRef idx="1">
+            <a:schemeClr val="accent1"/>
+          </a:fillRef>
+          <a:effectRef idx="0">
+            <a:schemeClr val="accent1"/>
+          </a:effectRef>
+          <a:fontRef idx="minor">
+            <a:schemeClr val="lt1"/>
+          </a:fontRef>
+        </p:style>
+        <p:txBody>
+          <a:bodyPr rtlCol="0" anchor="ctr"/>
+          <a:lstStyle/>
+          <a:p>
+            <a:pPr algn="ctr"/>
+            <a:endParaRPr lang="zh-CN" altLang="en-US"/>
+          </a:p>
+        </p:txBody>
+      </p:sp>
+      <p:grpSp>
+        <p:nvGrpSpPr>
+          <p:cNvPr id="12" name="组合 11">
+            <a:extLst>
+              <a:ext uri="{FF2B5EF4-FFF2-40B4-BE49-F238E27FC236}">
+                <a16:creationId xmlns:a16="http://schemas.microsoft.com/office/drawing/2014/main" id="{57014400-6F88-42B9-ADEF-E314402C6BF9}"/>
+              </a:ext>
+            </a:extLst>
+          </p:cNvPr>
+          <p:cNvGrpSpPr/>
+          <p:nvPr/>
+        </p:nvGrpSpPr>
+        <p:grpSpPr>
+          <a:xfrm>
+            <a:off x="6991585" y="2075466"/>
+            <a:ext cx="1252525" cy="1353534"/>
+            <a:chOff x="2913741" y="1970314"/>
+            <a:chExt cx="1349830" cy="1458686"/>
+          </a:xfrm>
+          <a:solidFill>
+            <a:srgbClr val="C0ACAC"/>
+          </a:solidFill>
+        </p:grpSpPr>
+        <p:sp>
+          <p:nvSpPr>
+            <p:cNvPr id="13" name="椭圆 12">
+              <a:extLst>
+                <a:ext uri="{FF2B5EF4-FFF2-40B4-BE49-F238E27FC236}">
+                  <a16:creationId xmlns:a16="http://schemas.microsoft.com/office/drawing/2014/main" id="{DE82325B-E8C1-47CD-8D69-7A0ADD60E913}"/>
+                </a:ext>
+              </a:extLst>
+            </p:cNvPr>
+            <p:cNvSpPr/>
+            <p:nvPr/>
+          </p:nvSpPr>
+          <p:spPr>
+            <a:xfrm>
+              <a:off x="3287486" y="1970314"/>
+              <a:ext cx="602344" cy="602344"/>
+            </a:xfrm>
+            <a:prstGeom prst="ellipse">
+              <a:avLst/>
+            </a:prstGeom>
+            <a:grpFill/>
+            <a:ln>
+              <a:solidFill>
+                <a:schemeClr val="tx1"/>
+              </a:solidFill>
+            </a:ln>
+          </p:spPr>
+          <p:style>
+            <a:lnRef idx="2">
+              <a:schemeClr val="accent1">
+                <a:shade val="50000"/>
+              </a:schemeClr>
+            </a:lnRef>
+            <a:fillRef idx="1">
+              <a:schemeClr val="accent1"/>
+            </a:fillRef>
+            <a:effectRef idx="0">
+              <a:schemeClr val="accent1"/>
+            </a:effectRef>
+            <a:fontRef idx="minor">
+              <a:schemeClr val="lt1"/>
+            </a:fontRef>
+          </p:style>
+          <p:txBody>
+            <a:bodyPr rtlCol="0" anchor="ctr"/>
+            <a:lstStyle/>
+            <a:p>
+              <a:pPr algn="ctr"/>
+              <a:endParaRPr lang="zh-CN" altLang="en-US"/>
+            </a:p>
+          </p:txBody>
+        </p:sp>
+        <p:sp>
+          <p:nvSpPr>
+            <p:cNvPr id="14" name="任意多边形: 形状 13">
+              <a:extLst>
+                <a:ext uri="{FF2B5EF4-FFF2-40B4-BE49-F238E27FC236}">
+                  <a16:creationId xmlns:a16="http://schemas.microsoft.com/office/drawing/2014/main" id="{917FBF1E-A591-42FE-8566-CBE0E87B77D3}"/>
+                </a:ext>
+              </a:extLst>
+            </p:cNvPr>
+            <p:cNvSpPr/>
+            <p:nvPr/>
+          </p:nvSpPr>
+          <p:spPr>
+            <a:xfrm>
+              <a:off x="2913741" y="2754086"/>
+              <a:ext cx="1349830" cy="674914"/>
+            </a:xfrm>
+            <a:custGeom>
+              <a:avLst/>
+              <a:gdLst>
+                <a:gd name="connsiteX0" fmla="*/ 674915 w 1349830"/>
+                <a:gd name="connsiteY0" fmla="*/ 0 h 674914"/>
+                <a:gd name="connsiteX1" fmla="*/ 1336118 w 1349830"/>
+                <a:gd name="connsiteY1" fmla="*/ 538896 h 674914"/>
+                <a:gd name="connsiteX2" fmla="*/ 1349830 w 1349830"/>
+                <a:gd name="connsiteY2" fmla="*/ 674914 h 674914"/>
+                <a:gd name="connsiteX3" fmla="*/ 0 w 1349830"/>
+                <a:gd name="connsiteY3" fmla="*/ 674914 h 674914"/>
+                <a:gd name="connsiteX4" fmla="*/ 13712 w 1349830"/>
+                <a:gd name="connsiteY4" fmla="*/ 538896 h 674914"/>
+                <a:gd name="connsiteX5" fmla="*/ 674915 w 1349830"/>
+                <a:gd name="connsiteY5" fmla="*/ 0 h 674914"/>
+              </a:gdLst>
+              <a:ahLst/>
+              <a:cxnLst>
+                <a:cxn ang="0">
+                  <a:pos x="connsiteX0" y="connsiteY0"/>
+                </a:cxn>
+                <a:cxn ang="0">
+                  <a:pos x="connsiteX1" y="connsiteY1"/>
+                </a:cxn>
+                <a:cxn ang="0">
+                  <a:pos x="connsiteX2" y="connsiteY2"/>
+                </a:cxn>
+                <a:cxn ang="0">
+                  <a:pos x="connsiteX3" y="connsiteY3"/>
+                </a:cxn>
+                <a:cxn ang="0">
+                  <a:pos x="connsiteX4" y="connsiteY4"/>
+                </a:cxn>
+                <a:cxn ang="0">
+                  <a:pos x="connsiteX5" y="connsiteY5"/>
+                </a:cxn>
+              </a:cxnLst>
+              <a:rect l="l" t="t" r="r" b="b"/>
+              <a:pathLst>
+                <a:path w="1349830" h="674914">
+                  <a:moveTo>
+                    <a:pt x="674915" y="0"/>
+                  </a:moveTo>
+                  <a:cubicBezTo>
+                    <a:pt x="1001067" y="0"/>
+                    <a:pt x="1273185" y="231349"/>
+                    <a:pt x="1336118" y="538896"/>
+                  </a:cubicBezTo>
+                  <a:lnTo>
+                    <a:pt x="1349830" y="674914"/>
+                  </a:lnTo>
+                  <a:lnTo>
+                    <a:pt x="0" y="674914"/>
+                  </a:lnTo>
+                  <a:lnTo>
+                    <a:pt x="13712" y="538896"/>
+                  </a:lnTo>
+                  <a:cubicBezTo>
+                    <a:pt x="76645" y="231349"/>
+                    <a:pt x="348763" y="0"/>
+                    <a:pt x="674915" y="0"/>
+                  </a:cubicBezTo>
+                  <a:close/>
+                </a:path>
+              </a:pathLst>
+            </a:custGeom>
+            <a:grpFill/>
+            <a:ln>
+              <a:solidFill>
+                <a:schemeClr val="tx1"/>
+              </a:solidFill>
+            </a:ln>
+          </p:spPr>
+          <p:style>
+            <a:lnRef idx="2">
+              <a:schemeClr val="accent1">
+                <a:shade val="50000"/>
+              </a:schemeClr>
+            </a:lnRef>
+            <a:fillRef idx="1">
+              <a:schemeClr val="accent1"/>
+            </a:fillRef>
+            <a:effectRef idx="0">
+              <a:schemeClr val="accent1"/>
+            </a:effectRef>
+            <a:fontRef idx="minor">
+              <a:schemeClr val="lt1"/>
+            </a:fontRef>
+          </p:style>
+          <p:txBody>
+            <a:bodyPr wrap="square" rtlCol="0" anchor="ctr">
+              <a:noAutofit/>
+            </a:bodyPr>
+            <a:lstStyle/>
+            <a:p>
+              <a:pPr algn="ctr"/>
+              <a:endParaRPr lang="zh-CN" altLang="en-US"/>
+            </a:p>
+          </p:txBody>
+        </p:sp>
+      </p:grpSp>
+      <p:sp>
+        <p:nvSpPr>
+          <p:cNvPr id="15" name="文本框 14">
+            <a:extLst>
+              <a:ext uri="{FF2B5EF4-FFF2-40B4-BE49-F238E27FC236}">
+                <a16:creationId xmlns:a16="http://schemas.microsoft.com/office/drawing/2014/main" id="{43CFD9D5-A35D-4112-87D4-7F2FFD02638E}"/>
+              </a:ext>
+            </a:extLst>
+          </p:cNvPr>
+          <p:cNvSpPr txBox="1"/>
+          <p:nvPr/>
+        </p:nvSpPr>
+        <p:spPr>
+          <a:xfrm>
+            <a:off x="6734621" y="3852876"/>
+            <a:ext cx="2300518" cy="646331"/>
+          </a:xfrm>
+          <a:prstGeom prst="rect">
+            <a:avLst/>
+          </a:prstGeom>
+          <a:noFill/>
+        </p:spPr>
+        <p:txBody>
+          <a:bodyPr wrap="square" rtlCol="0">
+            <a:spAutoFit/>
+          </a:bodyPr>
+          <a:lstStyle/>
+          <a:p>
+            <a:pPr algn="ctr"/>
+            <a:r>
+              <a:rPr lang="en-US" altLang="zh-CN" sz="3600" b="1" dirty="0">
+                <a:solidFill>
+                  <a:schemeClr val="bg1"/>
+                </a:solidFill>
+                <a:latin typeface="Agency FB" panose="020B0503020202020204" pitchFamily="34" charset="0"/>
+              </a:rPr>
+              <a:t>Two Players</a:t>
+            </a:r>
+            <a:endParaRPr lang="zh-CN" altLang="en-US" sz="3600" b="1" dirty="0">
+              <a:solidFill>
+                <a:schemeClr val="bg1"/>
+              </a:solidFill>
+              <a:latin typeface="Agency FB" panose="020B0503020202020204" pitchFamily="34" charset="0"/>
+            </a:endParaRPr>
+          </a:p>
+        </p:txBody>
+      </p:sp>
+      <p:grpSp>
+        <p:nvGrpSpPr>
+          <p:cNvPr id="16" name="组合 15">
+            <a:extLst>
+              <a:ext uri="{FF2B5EF4-FFF2-40B4-BE49-F238E27FC236}">
+                <a16:creationId xmlns:a16="http://schemas.microsoft.com/office/drawing/2014/main" id="{8581FC2A-58AA-4F7F-BE73-D9AA6652A0EF}"/>
+              </a:ext>
+            </a:extLst>
+          </p:cNvPr>
+          <p:cNvGrpSpPr/>
+          <p:nvPr/>
+        </p:nvGrpSpPr>
+        <p:grpSpPr>
+          <a:xfrm>
+            <a:off x="7334687" y="2122637"/>
+            <a:ext cx="1349830" cy="1458686"/>
+            <a:chOff x="2913741" y="1970314"/>
+            <a:chExt cx="1349830" cy="1458686"/>
+          </a:xfrm>
+        </p:grpSpPr>
+        <p:sp>
+          <p:nvSpPr>
+            <p:cNvPr id="17" name="椭圆 16">
+              <a:extLst>
+                <a:ext uri="{FF2B5EF4-FFF2-40B4-BE49-F238E27FC236}">
+                  <a16:creationId xmlns:a16="http://schemas.microsoft.com/office/drawing/2014/main" id="{988E352B-4C8B-4FEA-926B-E4B9FC23E243}"/>
+                </a:ext>
+              </a:extLst>
+            </p:cNvPr>
+            <p:cNvSpPr/>
+            <p:nvPr/>
+          </p:nvSpPr>
+          <p:spPr>
+            <a:xfrm>
+              <a:off x="3287486" y="1970314"/>
+              <a:ext cx="602344" cy="602344"/>
+            </a:xfrm>
+            <a:prstGeom prst="ellipse">
+              <a:avLst/>
+            </a:prstGeom>
+            <a:solidFill>
+              <a:schemeClr val="bg1"/>
+            </a:solidFill>
+            <a:ln>
+              <a:solidFill>
+                <a:schemeClr val="tx1"/>
+              </a:solidFill>
+            </a:ln>
+          </p:spPr>
+          <p:style>
+            <a:lnRef idx="2">
+              <a:schemeClr val="accent1">
+                <a:shade val="50000"/>
+              </a:schemeClr>
+            </a:lnRef>
+            <a:fillRef idx="1">
+              <a:schemeClr val="accent1"/>
+            </a:fillRef>
+            <a:effectRef idx="0">
+              <a:schemeClr val="accent1"/>
+            </a:effectRef>
+            <a:fontRef idx="minor">
+              <a:schemeClr val="lt1"/>
+            </a:fontRef>
+          </p:style>
+          <p:txBody>
+            <a:bodyPr rtlCol="0" anchor="ctr"/>
+            <a:lstStyle/>
+            <a:p>
+              <a:pPr algn="ctr"/>
+              <a:endParaRPr lang="zh-CN" altLang="en-US"/>
+            </a:p>
+          </p:txBody>
+        </p:sp>
+        <p:sp>
+          <p:nvSpPr>
+            <p:cNvPr id="18" name="任意多边形: 形状 17">
+              <a:extLst>
+                <a:ext uri="{FF2B5EF4-FFF2-40B4-BE49-F238E27FC236}">
+                  <a16:creationId xmlns:a16="http://schemas.microsoft.com/office/drawing/2014/main" id="{1ACB38D4-C6F6-431C-9C3B-25365CC72D6D}"/>
+                </a:ext>
+              </a:extLst>
+            </p:cNvPr>
+            <p:cNvSpPr/>
+            <p:nvPr/>
+          </p:nvSpPr>
+          <p:spPr>
+            <a:xfrm>
+              <a:off x="2913741" y="2754086"/>
+              <a:ext cx="1349830" cy="674914"/>
+            </a:xfrm>
+            <a:custGeom>
+              <a:avLst/>
+              <a:gdLst>
+                <a:gd name="connsiteX0" fmla="*/ 674915 w 1349830"/>
+                <a:gd name="connsiteY0" fmla="*/ 0 h 674914"/>
+                <a:gd name="connsiteX1" fmla="*/ 1336118 w 1349830"/>
+                <a:gd name="connsiteY1" fmla="*/ 538896 h 674914"/>
+                <a:gd name="connsiteX2" fmla="*/ 1349830 w 1349830"/>
+                <a:gd name="connsiteY2" fmla="*/ 674914 h 674914"/>
+                <a:gd name="connsiteX3" fmla="*/ 0 w 1349830"/>
+                <a:gd name="connsiteY3" fmla="*/ 674914 h 674914"/>
+                <a:gd name="connsiteX4" fmla="*/ 13712 w 1349830"/>
+                <a:gd name="connsiteY4" fmla="*/ 538896 h 674914"/>
+                <a:gd name="connsiteX5" fmla="*/ 674915 w 1349830"/>
+                <a:gd name="connsiteY5" fmla="*/ 0 h 674914"/>
+              </a:gdLst>
+              <a:ahLst/>
+              <a:cxnLst>
+                <a:cxn ang="0">
+                  <a:pos x="connsiteX0" y="connsiteY0"/>
+                </a:cxn>
+                <a:cxn ang="0">
+                  <a:pos x="connsiteX1" y="connsiteY1"/>
+                </a:cxn>
+                <a:cxn ang="0">
+                  <a:pos x="connsiteX2" y="connsiteY2"/>
+                </a:cxn>
+                <a:cxn ang="0">
+                  <a:pos x="connsiteX3" y="connsiteY3"/>
+                </a:cxn>
+                <a:cxn ang="0">
+                  <a:pos x="connsiteX4" y="connsiteY4"/>
+                </a:cxn>
+                <a:cxn ang="0">
+                  <a:pos x="connsiteX5" y="connsiteY5"/>
+                </a:cxn>
+              </a:cxnLst>
+              <a:rect l="l" t="t" r="r" b="b"/>
+              <a:pathLst>
+                <a:path w="1349830" h="674914">
+                  <a:moveTo>
+                    <a:pt x="674915" y="0"/>
+                  </a:moveTo>
+                  <a:cubicBezTo>
+                    <a:pt x="1001067" y="0"/>
+                    <a:pt x="1273185" y="231349"/>
+                    <a:pt x="1336118" y="538896"/>
+                  </a:cubicBezTo>
+                  <a:lnTo>
+                    <a:pt x="1349830" y="674914"/>
+                  </a:lnTo>
+                  <a:lnTo>
+                    <a:pt x="0" y="674914"/>
+                  </a:lnTo>
+                  <a:lnTo>
+                    <a:pt x="13712" y="538896"/>
+                  </a:lnTo>
+                  <a:cubicBezTo>
+                    <a:pt x="76645" y="231349"/>
+                    <a:pt x="348763" y="0"/>
+                    <a:pt x="674915" y="0"/>
+                  </a:cubicBezTo>
+                  <a:close/>
+                </a:path>
+              </a:pathLst>
+            </a:custGeom>
+            <a:solidFill>
+              <a:schemeClr val="bg1"/>
+            </a:solidFill>
+            <a:ln>
+              <a:solidFill>
+                <a:schemeClr val="tx1"/>
+              </a:solidFill>
+            </a:ln>
+          </p:spPr>
+          <p:style>
+            <a:lnRef idx="2">
+              <a:schemeClr val="accent1">
+                <a:shade val="50000"/>
+              </a:schemeClr>
+            </a:lnRef>
+            <a:fillRef idx="1">
+              <a:schemeClr val="accent1"/>
+            </a:fillRef>
+            <a:effectRef idx="0">
+              <a:schemeClr val="accent1"/>
+            </a:effectRef>
+            <a:fontRef idx="minor">
+              <a:schemeClr val="lt1"/>
+            </a:fontRef>
+          </p:style>
+          <p:txBody>
+            <a:bodyPr wrap="square" rtlCol="0" anchor="ctr">
+              <a:noAutofit/>
+            </a:bodyPr>
+            <a:lstStyle/>
+            <a:p>
+              <a:pPr algn="ctr"/>
+              <a:endParaRPr lang="zh-CN" altLang="en-US"/>
+            </a:p>
+          </p:txBody>
+        </p:sp>
+      </p:grpSp>
+      <p:sp>
+        <p:nvSpPr>
+          <p:cNvPr id="19" name="文本框 18">
+            <a:extLst>
+              <a:ext uri="{FF2B5EF4-FFF2-40B4-BE49-F238E27FC236}">
+                <a16:creationId xmlns:a16="http://schemas.microsoft.com/office/drawing/2014/main" id="{AAE28EE7-5307-4ADA-A0DE-FB02E436D20E}"/>
+              </a:ext>
+            </a:extLst>
+          </p:cNvPr>
+          <p:cNvSpPr txBox="1"/>
+          <p:nvPr/>
+        </p:nvSpPr>
+        <p:spPr>
+          <a:xfrm>
+            <a:off x="2438396" y="4796970"/>
+            <a:ext cx="2300518" cy="646331"/>
+          </a:xfrm>
+          <a:prstGeom prst="rect">
+            <a:avLst/>
+          </a:prstGeom>
+          <a:noFill/>
+        </p:spPr>
+        <p:txBody>
+          <a:bodyPr wrap="square" rtlCol="0">
+            <a:spAutoFit/>
+          </a:bodyPr>
+          <a:lstStyle/>
+          <a:p>
+            <a:pPr algn="ctr"/>
+            <a:r>
+              <a:rPr lang="en-US" altLang="zh-CN" sz="3600" b="1" dirty="0">
+                <a:solidFill>
+                  <a:schemeClr val="bg1"/>
+                </a:solidFill>
+                <a:latin typeface="Agency FB" panose="020B0503020202020204" pitchFamily="34" charset="0"/>
+              </a:rPr>
+              <a:t>[ Q ]</a:t>
+            </a:r>
+            <a:endParaRPr lang="zh-CN" altLang="en-US" sz="3600" b="1" dirty="0">
+              <a:solidFill>
+                <a:schemeClr val="bg1"/>
+              </a:solidFill>
+              <a:latin typeface="Agency FB" panose="020B0503020202020204" pitchFamily="34" charset="0"/>
+            </a:endParaRPr>
+          </a:p>
+        </p:txBody>
+      </p:sp>
+      <p:sp>
+        <p:nvSpPr>
+          <p:cNvPr id="20" name="文本框 19">
+            <a:extLst>
+              <a:ext uri="{FF2B5EF4-FFF2-40B4-BE49-F238E27FC236}">
+                <a16:creationId xmlns:a16="http://schemas.microsoft.com/office/drawing/2014/main" id="{138C06CF-525D-4FA1-8F07-EAC3C4771F30}"/>
+              </a:ext>
+            </a:extLst>
+          </p:cNvPr>
+          <p:cNvSpPr txBox="1"/>
+          <p:nvPr/>
+        </p:nvSpPr>
+        <p:spPr>
+          <a:xfrm>
+            <a:off x="6747052" y="4788825"/>
+            <a:ext cx="2300518" cy="646331"/>
+          </a:xfrm>
+          <a:prstGeom prst="rect">
+            <a:avLst/>
+          </a:prstGeom>
+          <a:noFill/>
+        </p:spPr>
+        <p:txBody>
+          <a:bodyPr wrap="square" rtlCol="0">
+            <a:spAutoFit/>
+          </a:bodyPr>
+          <a:lstStyle/>
+          <a:p>
+            <a:pPr algn="ctr"/>
+            <a:r>
+              <a:rPr lang="en-US" altLang="zh-CN" sz="3600" b="1" dirty="0">
+                <a:solidFill>
+                  <a:schemeClr val="bg1"/>
+                </a:solidFill>
+                <a:latin typeface="Agency FB" panose="020B0503020202020204" pitchFamily="34" charset="0"/>
+              </a:rPr>
+              <a:t>[ E ]</a:t>
+            </a:r>
+            <a:endParaRPr lang="zh-CN" altLang="en-US" sz="3600" b="1" dirty="0">
+              <a:solidFill>
+                <a:schemeClr val="bg1"/>
+              </a:solidFill>
+              <a:latin typeface="Agency FB" panose="020B0503020202020204" pitchFamily="34" charset="0"/>
+            </a:endParaRPr>
+          </a:p>
+        </p:txBody>
+      </p:sp>
+    </p:spTree>
+    <p:extLst>
+      <p:ext uri="{BB962C8B-B14F-4D97-AF65-F5344CB8AC3E}">
+        <p14:creationId xmlns:p14="http://schemas.microsoft.com/office/powerpoint/2010/main" val="1270119608"/>
+      </p:ext>
+    </p:extLst>
+  </p:cSld>
+  <p:clrMapOvr>
+    <a:masterClrMapping/>
+  </p:clrMapOvr>
+</p:sld>
+</file>
+
+<file path=ppt/slides/slide5.xml><?xml version="1.0" encoding="utf-8"?>
+<p:sld xmlns:a="http://schemas.openxmlformats.org/drawingml/2006/main" xmlns:r="http://schemas.openxmlformats.org/officeDocument/2006/relationships" xmlns:p="http://schemas.openxmlformats.org/presentationml/2006/main">
+  <p:cSld>
+    <p:spTree>
+      <p:nvGrpSpPr>
+        <p:cNvPr id="1" name=""/>
+        <p:cNvGrpSpPr/>
+        <p:nvPr/>
+      </p:nvGrpSpPr>
+      <p:grpSpPr>
+        <a:xfrm>
+          <a:off x="0" y="0"/>
+          <a:ext cx="0" cy="0"/>
+          <a:chOff x="0" y="0"/>
+          <a:chExt cx="0" cy="0"/>
+        </a:xfrm>
+      </p:grpSpPr>
+      <p:sp>
+        <p:nvSpPr>
+          <p:cNvPr id="4" name="矩形: 圆角 3">
+            <a:extLst>
+              <a:ext uri="{FF2B5EF4-FFF2-40B4-BE49-F238E27FC236}">
+                <a16:creationId xmlns:a16="http://schemas.microsoft.com/office/drawing/2014/main" id="{D6DCA219-4441-40DA-A7D1-CF1F27461A33}"/>
+              </a:ext>
+            </a:extLst>
+          </p:cNvPr>
+          <p:cNvSpPr/>
+          <p:nvPr/>
+        </p:nvSpPr>
+        <p:spPr>
+          <a:xfrm>
+            <a:off x="2188027" y="1618343"/>
+            <a:ext cx="2801257" cy="3069772"/>
+          </a:xfrm>
+          <a:prstGeom prst="roundRect">
+            <a:avLst>
+              <a:gd name="adj" fmla="val 5009"/>
+            </a:avLst>
+          </a:prstGeom>
+          <a:solidFill>
+            <a:schemeClr val="accent6">
+              <a:lumMod val="75000"/>
+            </a:schemeClr>
+          </a:solidFill>
+          <a:ln w="44450">
+            <a:solidFill>
+              <a:srgbClr val="92D050"/>
+            </a:solidFill>
+          </a:ln>
+        </p:spPr>
+        <p:style>
+          <a:lnRef idx="2">
+            <a:schemeClr val="accent1">
+              <a:shade val="50000"/>
+            </a:schemeClr>
+          </a:lnRef>
+          <a:fillRef idx="1">
+            <a:schemeClr val="accent1"/>
+          </a:fillRef>
+          <a:effectRef idx="0">
+            <a:schemeClr val="accent1"/>
+          </a:effectRef>
+          <a:fontRef idx="minor">
+            <a:schemeClr val="lt1"/>
+          </a:fontRef>
+        </p:style>
+        <p:txBody>
+          <a:bodyPr rtlCol="0" anchor="ctr"/>
+          <a:lstStyle/>
+          <a:p>
+            <a:pPr algn="ctr"/>
+            <a:endParaRPr lang="zh-CN" altLang="en-US"/>
+          </a:p>
+        </p:txBody>
+      </p:sp>
+      <p:grpSp>
+        <p:nvGrpSpPr>
+          <p:cNvPr id="5" name="组合 4">
+            <a:extLst>
+              <a:ext uri="{FF2B5EF4-FFF2-40B4-BE49-F238E27FC236}">
+                <a16:creationId xmlns:a16="http://schemas.microsoft.com/office/drawing/2014/main" id="{4CE32760-8DB7-4924-9362-4ED68631EC07}"/>
+              </a:ext>
+            </a:extLst>
+          </p:cNvPr>
+          <p:cNvGrpSpPr/>
+          <p:nvPr/>
+        </p:nvGrpSpPr>
+        <p:grpSpPr>
+          <a:xfrm>
+            <a:off x="10150930" y="512297"/>
+            <a:ext cx="1349830" cy="1458686"/>
+            <a:chOff x="2913741" y="1970314"/>
+            <a:chExt cx="1349830" cy="1458686"/>
+          </a:xfrm>
+        </p:grpSpPr>
+        <p:sp>
+          <p:nvSpPr>
+            <p:cNvPr id="6" name="椭圆 5">
+              <a:extLst>
+                <a:ext uri="{FF2B5EF4-FFF2-40B4-BE49-F238E27FC236}">
+                  <a16:creationId xmlns:a16="http://schemas.microsoft.com/office/drawing/2014/main" id="{F94F37A3-E50B-4EBF-B900-515616DF468F}"/>
+                </a:ext>
+              </a:extLst>
+            </p:cNvPr>
+            <p:cNvSpPr/>
+            <p:nvPr/>
+          </p:nvSpPr>
+          <p:spPr>
+            <a:xfrm>
+              <a:off x="3287486" y="1970314"/>
+              <a:ext cx="602344" cy="602344"/>
+            </a:xfrm>
+            <a:prstGeom prst="ellipse">
+              <a:avLst/>
+            </a:prstGeom>
+            <a:solidFill>
+              <a:schemeClr val="bg1"/>
+            </a:solidFill>
+            <a:ln>
+              <a:solidFill>
+                <a:schemeClr val="tx1"/>
+              </a:solidFill>
+            </a:ln>
+          </p:spPr>
+          <p:style>
+            <a:lnRef idx="2">
+              <a:schemeClr val="accent1">
+                <a:shade val="50000"/>
+              </a:schemeClr>
+            </a:lnRef>
+            <a:fillRef idx="1">
+              <a:schemeClr val="accent1"/>
+            </a:fillRef>
+            <a:effectRef idx="0">
+              <a:schemeClr val="accent1"/>
+            </a:effectRef>
+            <a:fontRef idx="minor">
+              <a:schemeClr val="lt1"/>
+            </a:fontRef>
+          </p:style>
+          <p:txBody>
+            <a:bodyPr rtlCol="0" anchor="ctr"/>
+            <a:lstStyle/>
+            <a:p>
+              <a:pPr algn="ctr"/>
+              <a:endParaRPr lang="zh-CN" altLang="en-US"/>
+            </a:p>
+          </p:txBody>
+        </p:sp>
+        <p:sp>
+          <p:nvSpPr>
+            <p:cNvPr id="7" name="任意多边形: 形状 6">
+              <a:extLst>
+                <a:ext uri="{FF2B5EF4-FFF2-40B4-BE49-F238E27FC236}">
+                  <a16:creationId xmlns:a16="http://schemas.microsoft.com/office/drawing/2014/main" id="{53344FCB-27D9-4F81-B726-F7E25B8BA80C}"/>
+                </a:ext>
+              </a:extLst>
+            </p:cNvPr>
+            <p:cNvSpPr/>
+            <p:nvPr/>
+          </p:nvSpPr>
+          <p:spPr>
+            <a:xfrm>
+              <a:off x="2913741" y="2754086"/>
+              <a:ext cx="1349830" cy="674914"/>
+            </a:xfrm>
+            <a:custGeom>
+              <a:avLst/>
+              <a:gdLst>
+                <a:gd name="connsiteX0" fmla="*/ 674915 w 1349830"/>
+                <a:gd name="connsiteY0" fmla="*/ 0 h 674914"/>
+                <a:gd name="connsiteX1" fmla="*/ 1336118 w 1349830"/>
+                <a:gd name="connsiteY1" fmla="*/ 538896 h 674914"/>
+                <a:gd name="connsiteX2" fmla="*/ 1349830 w 1349830"/>
+                <a:gd name="connsiteY2" fmla="*/ 674914 h 674914"/>
+                <a:gd name="connsiteX3" fmla="*/ 0 w 1349830"/>
+                <a:gd name="connsiteY3" fmla="*/ 674914 h 674914"/>
+                <a:gd name="connsiteX4" fmla="*/ 13712 w 1349830"/>
+                <a:gd name="connsiteY4" fmla="*/ 538896 h 674914"/>
+                <a:gd name="connsiteX5" fmla="*/ 674915 w 1349830"/>
+                <a:gd name="connsiteY5" fmla="*/ 0 h 674914"/>
+              </a:gdLst>
+              <a:ahLst/>
+              <a:cxnLst>
+                <a:cxn ang="0">
+                  <a:pos x="connsiteX0" y="connsiteY0"/>
+                </a:cxn>
+                <a:cxn ang="0">
+                  <a:pos x="connsiteX1" y="connsiteY1"/>
+                </a:cxn>
+                <a:cxn ang="0">
+                  <a:pos x="connsiteX2" y="connsiteY2"/>
+                </a:cxn>
+                <a:cxn ang="0">
+                  <a:pos x="connsiteX3" y="connsiteY3"/>
+                </a:cxn>
+                <a:cxn ang="0">
+                  <a:pos x="connsiteX4" y="connsiteY4"/>
+                </a:cxn>
+                <a:cxn ang="0">
+                  <a:pos x="connsiteX5" y="connsiteY5"/>
+                </a:cxn>
+              </a:cxnLst>
+              <a:rect l="l" t="t" r="r" b="b"/>
+              <a:pathLst>
+                <a:path w="1349830" h="674914">
+                  <a:moveTo>
+                    <a:pt x="674915" y="0"/>
+                  </a:moveTo>
+                  <a:cubicBezTo>
+                    <a:pt x="1001067" y="0"/>
+                    <a:pt x="1273185" y="231349"/>
+                    <a:pt x="1336118" y="538896"/>
+                  </a:cubicBezTo>
+                  <a:lnTo>
+                    <a:pt x="1349830" y="674914"/>
+                  </a:lnTo>
+                  <a:lnTo>
+                    <a:pt x="0" y="674914"/>
+                  </a:lnTo>
+                  <a:lnTo>
+                    <a:pt x="13712" y="538896"/>
+                  </a:lnTo>
+                  <a:cubicBezTo>
+                    <a:pt x="76645" y="231349"/>
+                    <a:pt x="348763" y="0"/>
+                    <a:pt x="674915" y="0"/>
+                  </a:cubicBezTo>
+                  <a:close/>
+                </a:path>
+              </a:pathLst>
+            </a:custGeom>
+            <a:solidFill>
+              <a:schemeClr val="bg1"/>
+            </a:solidFill>
+            <a:ln>
+              <a:solidFill>
+                <a:schemeClr val="tx1"/>
+              </a:solidFill>
+            </a:ln>
+          </p:spPr>
+          <p:style>
+            <a:lnRef idx="2">
+              <a:schemeClr val="accent1">
+                <a:shade val="50000"/>
+              </a:schemeClr>
+            </a:lnRef>
+            <a:fillRef idx="1">
+              <a:schemeClr val="accent1"/>
+            </a:fillRef>
+            <a:effectRef idx="0">
+              <a:schemeClr val="accent1"/>
+            </a:effectRef>
+            <a:fontRef idx="minor">
+              <a:schemeClr val="lt1"/>
+            </a:fontRef>
+          </p:style>
+          <p:txBody>
+            <a:bodyPr wrap="square" rtlCol="0" anchor="ctr">
+              <a:noAutofit/>
+            </a:bodyPr>
+            <a:lstStyle/>
+            <a:p>
+              <a:pPr algn="ctr"/>
+              <a:endParaRPr lang="zh-CN" altLang="en-US"/>
+            </a:p>
+          </p:txBody>
+        </p:sp>
+      </p:grpSp>
+      <p:sp>
+        <p:nvSpPr>
+          <p:cNvPr id="8" name="文本框 7">
+            <a:extLst>
+              <a:ext uri="{FF2B5EF4-FFF2-40B4-BE49-F238E27FC236}">
+                <a16:creationId xmlns:a16="http://schemas.microsoft.com/office/drawing/2014/main" id="{83F1B3D1-CB26-4EDD-84BF-55D97976A1CF}"/>
+              </a:ext>
+            </a:extLst>
+          </p:cNvPr>
+          <p:cNvSpPr txBox="1"/>
+          <p:nvPr/>
+        </p:nvSpPr>
+        <p:spPr>
+          <a:xfrm>
+            <a:off x="2438396" y="3852876"/>
+            <a:ext cx="2300518" cy="646331"/>
+          </a:xfrm>
+          <a:prstGeom prst="rect">
+            <a:avLst/>
+          </a:prstGeom>
+          <a:noFill/>
+        </p:spPr>
+        <p:txBody>
+          <a:bodyPr wrap="square" rtlCol="0">
+            <a:spAutoFit/>
+          </a:bodyPr>
+          <a:lstStyle/>
+          <a:p>
+            <a:pPr algn="ctr"/>
+            <a:r>
+              <a:rPr lang="en-US" altLang="zh-CN" sz="3600" b="1" dirty="0">
+                <a:solidFill>
+                  <a:schemeClr val="bg1"/>
+                </a:solidFill>
+                <a:latin typeface="Agency FB" panose="020B0503020202020204" pitchFamily="34" charset="0"/>
+              </a:rPr>
+              <a:t>Easy Mode</a:t>
+            </a:r>
+            <a:endParaRPr lang="zh-CN" altLang="en-US" sz="3600" b="1" dirty="0">
+              <a:solidFill>
+                <a:schemeClr val="bg1"/>
+              </a:solidFill>
+              <a:latin typeface="Agency FB" panose="020B0503020202020204" pitchFamily="34" charset="0"/>
+            </a:endParaRPr>
+          </a:p>
+        </p:txBody>
+      </p:sp>
+      <p:sp>
+        <p:nvSpPr>
+          <p:cNvPr id="9" name="文本框 8">
+            <a:extLst>
+              <a:ext uri="{FF2B5EF4-FFF2-40B4-BE49-F238E27FC236}">
+                <a16:creationId xmlns:a16="http://schemas.microsoft.com/office/drawing/2014/main" id="{80FD9D5F-BF75-4F8C-9F1B-8053F7E43288}"/>
+              </a:ext>
+            </a:extLst>
+          </p:cNvPr>
+          <p:cNvSpPr txBox="1"/>
+          <p:nvPr/>
+        </p:nvSpPr>
+        <p:spPr>
+          <a:xfrm>
+            <a:off x="2438396" y="4796970"/>
+            <a:ext cx="2300518" cy="646331"/>
+          </a:xfrm>
+          <a:prstGeom prst="rect">
+            <a:avLst/>
+          </a:prstGeom>
+          <a:noFill/>
+        </p:spPr>
+        <p:txBody>
+          <a:bodyPr wrap="square" rtlCol="0">
+            <a:spAutoFit/>
+          </a:bodyPr>
+          <a:lstStyle/>
+          <a:p>
+            <a:pPr algn="ctr"/>
+            <a:r>
+              <a:rPr lang="en-US" altLang="zh-CN" sz="3600" b="1" dirty="0">
+                <a:solidFill>
+                  <a:schemeClr val="bg1"/>
+                </a:solidFill>
+                <a:latin typeface="Agency FB" panose="020B0503020202020204" pitchFamily="34" charset="0"/>
+              </a:rPr>
+              <a:t>[ Q ]</a:t>
+            </a:r>
+            <a:endParaRPr lang="zh-CN" altLang="en-US" sz="3600" b="1" dirty="0">
+              <a:solidFill>
+                <a:schemeClr val="bg1"/>
+              </a:solidFill>
+              <a:latin typeface="Agency FB" panose="020B0503020202020204" pitchFamily="34" charset="0"/>
+            </a:endParaRPr>
+          </a:p>
+        </p:txBody>
+      </p:sp>
+      <p:sp>
+        <p:nvSpPr>
+          <p:cNvPr id="10" name="矩形: 圆角 9">
+            <a:extLst>
+              <a:ext uri="{FF2B5EF4-FFF2-40B4-BE49-F238E27FC236}">
+                <a16:creationId xmlns:a16="http://schemas.microsoft.com/office/drawing/2014/main" id="{2322585E-B2D1-4C21-806D-8A10D07D886A}"/>
+              </a:ext>
+            </a:extLst>
+          </p:cNvPr>
+          <p:cNvSpPr/>
+          <p:nvPr/>
+        </p:nvSpPr>
+        <p:spPr>
+          <a:xfrm>
+            <a:off x="12638617" y="5970210"/>
+            <a:ext cx="2801257" cy="3069772"/>
+          </a:xfrm>
+          <a:prstGeom prst="roundRect">
+            <a:avLst>
+              <a:gd name="adj" fmla="val 5009"/>
+            </a:avLst>
+          </a:prstGeom>
+          <a:solidFill>
+            <a:srgbClr val="920000"/>
+          </a:solidFill>
+          <a:ln w="44450">
+            <a:solidFill>
+              <a:srgbClr val="DE0000"/>
+            </a:solidFill>
+          </a:ln>
+        </p:spPr>
+        <p:style>
+          <a:lnRef idx="2">
+            <a:schemeClr val="accent1">
+              <a:shade val="50000"/>
+            </a:schemeClr>
+          </a:lnRef>
+          <a:fillRef idx="1">
+            <a:schemeClr val="accent1"/>
+          </a:fillRef>
+          <a:effectRef idx="0">
+            <a:schemeClr val="accent1"/>
+          </a:effectRef>
+          <a:fontRef idx="minor">
+            <a:schemeClr val="lt1"/>
+          </a:fontRef>
+        </p:style>
+        <p:txBody>
+          <a:bodyPr rtlCol="0" anchor="ctr"/>
+          <a:lstStyle/>
+          <a:p>
+            <a:pPr algn="ctr"/>
+            <a:endParaRPr lang="zh-CN" altLang="en-US" dirty="0"/>
+          </a:p>
+        </p:txBody>
+      </p:sp>
+      <p:grpSp>
+        <p:nvGrpSpPr>
+          <p:cNvPr id="11" name="组合 10">
+            <a:extLst>
+              <a:ext uri="{FF2B5EF4-FFF2-40B4-BE49-F238E27FC236}">
+                <a16:creationId xmlns:a16="http://schemas.microsoft.com/office/drawing/2014/main" id="{EEB2E14A-6947-4004-9AC8-E5484F2D4A6A}"/>
+              </a:ext>
+            </a:extLst>
+          </p:cNvPr>
+          <p:cNvGrpSpPr/>
+          <p:nvPr/>
+        </p:nvGrpSpPr>
+        <p:grpSpPr>
+          <a:xfrm>
+            <a:off x="10150930" y="2519565"/>
+            <a:ext cx="1349830" cy="1458686"/>
+            <a:chOff x="2913741" y="1970314"/>
+            <a:chExt cx="1349830" cy="1458686"/>
+          </a:xfrm>
+        </p:grpSpPr>
+        <p:sp>
+          <p:nvSpPr>
+            <p:cNvPr id="12" name="椭圆 11">
+              <a:extLst>
+                <a:ext uri="{FF2B5EF4-FFF2-40B4-BE49-F238E27FC236}">
+                  <a16:creationId xmlns:a16="http://schemas.microsoft.com/office/drawing/2014/main" id="{0E555515-7A62-494C-9959-8FCB113484A7}"/>
+                </a:ext>
+              </a:extLst>
+            </p:cNvPr>
+            <p:cNvSpPr/>
+            <p:nvPr/>
+          </p:nvSpPr>
+          <p:spPr>
+            <a:xfrm>
+              <a:off x="3287486" y="1970314"/>
+              <a:ext cx="602344" cy="602344"/>
+            </a:xfrm>
+            <a:prstGeom prst="ellipse">
+              <a:avLst/>
+            </a:prstGeom>
+            <a:solidFill>
+              <a:schemeClr val="bg1"/>
+            </a:solidFill>
+            <a:ln>
+              <a:solidFill>
+                <a:schemeClr val="tx1"/>
+              </a:solidFill>
+            </a:ln>
+          </p:spPr>
+          <p:style>
+            <a:lnRef idx="2">
+              <a:schemeClr val="accent1">
+                <a:shade val="50000"/>
+              </a:schemeClr>
+            </a:lnRef>
+            <a:fillRef idx="1">
+              <a:schemeClr val="accent1"/>
+            </a:fillRef>
+            <a:effectRef idx="0">
+              <a:schemeClr val="accent1"/>
+            </a:effectRef>
+            <a:fontRef idx="minor">
+              <a:schemeClr val="lt1"/>
+            </a:fontRef>
+          </p:style>
+          <p:txBody>
+            <a:bodyPr rtlCol="0" anchor="ctr"/>
+            <a:lstStyle/>
+            <a:p>
+              <a:pPr algn="ctr"/>
+              <a:endParaRPr lang="zh-CN" altLang="en-US"/>
+            </a:p>
+          </p:txBody>
+        </p:sp>
+        <p:sp>
+          <p:nvSpPr>
+            <p:cNvPr id="13" name="任意多边形: 形状 12">
+              <a:extLst>
+                <a:ext uri="{FF2B5EF4-FFF2-40B4-BE49-F238E27FC236}">
+                  <a16:creationId xmlns:a16="http://schemas.microsoft.com/office/drawing/2014/main" id="{620C40DA-2868-4F9F-AD11-34CB536E5C52}"/>
+                </a:ext>
+              </a:extLst>
+            </p:cNvPr>
+            <p:cNvSpPr/>
+            <p:nvPr/>
+          </p:nvSpPr>
+          <p:spPr>
+            <a:xfrm>
+              <a:off x="2913741" y="2754086"/>
+              <a:ext cx="1349830" cy="674914"/>
+            </a:xfrm>
+            <a:custGeom>
+              <a:avLst/>
+              <a:gdLst>
+                <a:gd name="connsiteX0" fmla="*/ 674915 w 1349830"/>
+                <a:gd name="connsiteY0" fmla="*/ 0 h 674914"/>
+                <a:gd name="connsiteX1" fmla="*/ 1336118 w 1349830"/>
+                <a:gd name="connsiteY1" fmla="*/ 538896 h 674914"/>
+                <a:gd name="connsiteX2" fmla="*/ 1349830 w 1349830"/>
+                <a:gd name="connsiteY2" fmla="*/ 674914 h 674914"/>
+                <a:gd name="connsiteX3" fmla="*/ 0 w 1349830"/>
+                <a:gd name="connsiteY3" fmla="*/ 674914 h 674914"/>
+                <a:gd name="connsiteX4" fmla="*/ 13712 w 1349830"/>
+                <a:gd name="connsiteY4" fmla="*/ 538896 h 674914"/>
+                <a:gd name="connsiteX5" fmla="*/ 674915 w 1349830"/>
+                <a:gd name="connsiteY5" fmla="*/ 0 h 674914"/>
+              </a:gdLst>
+              <a:ahLst/>
+              <a:cxnLst>
+                <a:cxn ang="0">
+                  <a:pos x="connsiteX0" y="connsiteY0"/>
+                </a:cxn>
+                <a:cxn ang="0">
+                  <a:pos x="connsiteX1" y="connsiteY1"/>
+                </a:cxn>
+                <a:cxn ang="0">
+                  <a:pos x="connsiteX2" y="connsiteY2"/>
+                </a:cxn>
+                <a:cxn ang="0">
+                  <a:pos x="connsiteX3" y="connsiteY3"/>
+                </a:cxn>
+                <a:cxn ang="0">
+                  <a:pos x="connsiteX4" y="connsiteY4"/>
+                </a:cxn>
+                <a:cxn ang="0">
+                  <a:pos x="connsiteX5" y="connsiteY5"/>
+                </a:cxn>
+              </a:cxnLst>
+              <a:rect l="l" t="t" r="r" b="b"/>
+              <a:pathLst>
+                <a:path w="1349830" h="674914">
+                  <a:moveTo>
+                    <a:pt x="674915" y="0"/>
+                  </a:moveTo>
+                  <a:cubicBezTo>
+                    <a:pt x="1001067" y="0"/>
+                    <a:pt x="1273185" y="231349"/>
+                    <a:pt x="1336118" y="538896"/>
+                  </a:cubicBezTo>
+                  <a:lnTo>
+                    <a:pt x="1349830" y="674914"/>
+                  </a:lnTo>
+                  <a:lnTo>
+                    <a:pt x="0" y="674914"/>
+                  </a:lnTo>
+                  <a:lnTo>
+                    <a:pt x="13712" y="538896"/>
+                  </a:lnTo>
+                  <a:cubicBezTo>
+                    <a:pt x="76645" y="231349"/>
+                    <a:pt x="348763" y="0"/>
+                    <a:pt x="674915" y="0"/>
+                  </a:cubicBezTo>
+                  <a:close/>
+                </a:path>
+              </a:pathLst>
+            </a:custGeom>
+            <a:solidFill>
+              <a:schemeClr val="bg1"/>
+            </a:solidFill>
+            <a:ln>
+              <a:solidFill>
+                <a:schemeClr val="tx1"/>
+              </a:solidFill>
+            </a:ln>
+          </p:spPr>
+          <p:style>
+            <a:lnRef idx="2">
+              <a:schemeClr val="accent1">
+                <a:shade val="50000"/>
+              </a:schemeClr>
+            </a:lnRef>
+            <a:fillRef idx="1">
+              <a:schemeClr val="accent1"/>
+            </a:fillRef>
+            <a:effectRef idx="0">
+              <a:schemeClr val="accent1"/>
+            </a:effectRef>
+            <a:fontRef idx="minor">
+              <a:schemeClr val="lt1"/>
+            </a:fontRef>
+          </p:style>
+          <p:txBody>
+            <a:bodyPr wrap="square" rtlCol="0" anchor="ctr">
+              <a:noAutofit/>
+            </a:bodyPr>
+            <a:lstStyle/>
+            <a:p>
+              <a:pPr algn="ctr"/>
+              <a:endParaRPr lang="zh-CN" altLang="en-US"/>
+            </a:p>
+          </p:txBody>
+        </p:sp>
+      </p:grpSp>
+      <p:sp>
+        <p:nvSpPr>
+          <p:cNvPr id="14" name="文本框 13">
+            <a:extLst>
+              <a:ext uri="{FF2B5EF4-FFF2-40B4-BE49-F238E27FC236}">
+                <a16:creationId xmlns:a16="http://schemas.microsoft.com/office/drawing/2014/main" id="{0B260FC3-5A32-4B07-A1BA-049E6667A52D}"/>
+              </a:ext>
+            </a:extLst>
+          </p:cNvPr>
+          <p:cNvSpPr txBox="1"/>
+          <p:nvPr/>
+        </p:nvSpPr>
+        <p:spPr>
+          <a:xfrm>
+            <a:off x="12888986" y="8204743"/>
+            <a:ext cx="2300518" cy="646331"/>
+          </a:xfrm>
+          <a:prstGeom prst="rect">
+            <a:avLst/>
+          </a:prstGeom>
+          <a:noFill/>
+        </p:spPr>
+        <p:txBody>
+          <a:bodyPr wrap="square" rtlCol="0">
+            <a:spAutoFit/>
+          </a:bodyPr>
+          <a:lstStyle/>
+          <a:p>
+            <a:pPr algn="ctr"/>
+            <a:r>
+              <a:rPr lang="en-US" altLang="zh-CN" sz="3600" b="1" dirty="0">
+                <a:solidFill>
+                  <a:schemeClr val="bg1"/>
+                </a:solidFill>
+                <a:latin typeface="Agency FB" panose="020B0503020202020204" pitchFamily="34" charset="0"/>
+              </a:rPr>
+              <a:t>Hard Mode</a:t>
+            </a:r>
+            <a:endParaRPr lang="zh-CN" altLang="en-US" sz="3600" b="1" dirty="0">
+              <a:solidFill>
+                <a:schemeClr val="bg1"/>
+              </a:solidFill>
+              <a:latin typeface="Agency FB" panose="020B0503020202020204" pitchFamily="34" charset="0"/>
+            </a:endParaRPr>
+          </a:p>
+        </p:txBody>
+      </p:sp>
+      <p:sp>
+        <p:nvSpPr>
+          <p:cNvPr id="15" name="文本框 14">
+            <a:extLst>
+              <a:ext uri="{FF2B5EF4-FFF2-40B4-BE49-F238E27FC236}">
+                <a16:creationId xmlns:a16="http://schemas.microsoft.com/office/drawing/2014/main" id="{19AA5AE1-7390-4ACD-A45F-D66CD3557419}"/>
+              </a:ext>
+            </a:extLst>
+          </p:cNvPr>
+          <p:cNvSpPr txBox="1"/>
+          <p:nvPr/>
+        </p:nvSpPr>
+        <p:spPr>
+          <a:xfrm>
+            <a:off x="12888986" y="9148837"/>
+            <a:ext cx="2300518" cy="646331"/>
+          </a:xfrm>
+          <a:prstGeom prst="rect">
+            <a:avLst/>
+          </a:prstGeom>
+          <a:noFill/>
+        </p:spPr>
+        <p:txBody>
+          <a:bodyPr wrap="square" rtlCol="0">
+            <a:spAutoFit/>
+          </a:bodyPr>
+          <a:lstStyle/>
+          <a:p>
+            <a:pPr algn="ctr"/>
+            <a:r>
+              <a:rPr lang="en-US" altLang="zh-CN" sz="3600" b="1" dirty="0">
+                <a:solidFill>
+                  <a:schemeClr val="bg1"/>
+                </a:solidFill>
+                <a:latin typeface="Agency FB" panose="020B0503020202020204" pitchFamily="34" charset="0"/>
+              </a:rPr>
+              <a:t>[ E ]</a:t>
+            </a:r>
+            <a:endParaRPr lang="zh-CN" altLang="en-US" sz="3600" b="1" dirty="0">
+              <a:solidFill>
+                <a:schemeClr val="bg1"/>
+              </a:solidFill>
+              <a:latin typeface="Agency FB" panose="020B0503020202020204" pitchFamily="34" charset="0"/>
+            </a:endParaRPr>
+          </a:p>
+        </p:txBody>
+      </p:sp>
+      <p:sp>
+        <p:nvSpPr>
+          <p:cNvPr id="18" name="任意多边形: 形状 17">
+            <a:extLst>
+              <a:ext uri="{FF2B5EF4-FFF2-40B4-BE49-F238E27FC236}">
+                <a16:creationId xmlns:a16="http://schemas.microsoft.com/office/drawing/2014/main" id="{50A6AB7D-6AD5-4F4F-B686-4D5DC55EE329}"/>
+              </a:ext>
+            </a:extLst>
+          </p:cNvPr>
+          <p:cNvSpPr/>
+          <p:nvPr/>
+        </p:nvSpPr>
+        <p:spPr>
+          <a:xfrm rot="8100000">
+            <a:off x="2888065" y="2406824"/>
+            <a:ext cx="1401179" cy="852488"/>
+          </a:xfrm>
+          <a:custGeom>
+            <a:avLst/>
+            <a:gdLst>
+              <a:gd name="connsiteX0" fmla="*/ 41847 w 1401179"/>
+              <a:gd name="connsiteY0" fmla="*/ 243903 h 852488"/>
+              <a:gd name="connsiteX1" fmla="*/ 0 w 1401179"/>
+              <a:gd name="connsiteY1" fmla="*/ 142875 h 852488"/>
+              <a:gd name="connsiteX2" fmla="*/ 142875 w 1401179"/>
+              <a:gd name="connsiteY2" fmla="*/ 0 h 852488"/>
+              <a:gd name="connsiteX3" fmla="*/ 1256718 w 1401179"/>
+              <a:gd name="connsiteY3" fmla="*/ 0 h 852488"/>
+              <a:gd name="connsiteX4" fmla="*/ 1357746 w 1401179"/>
+              <a:gd name="connsiteY4" fmla="*/ 41847 h 852488"/>
+              <a:gd name="connsiteX5" fmla="*/ 1358387 w 1401179"/>
+              <a:gd name="connsiteY5" fmla="*/ 42798 h 852488"/>
+              <a:gd name="connsiteX6" fmla="*/ 1359332 w 1401179"/>
+              <a:gd name="connsiteY6" fmla="*/ 43435 h 852488"/>
+              <a:gd name="connsiteX7" fmla="*/ 1401179 w 1401179"/>
+              <a:gd name="connsiteY7" fmla="*/ 144463 h 852488"/>
+              <a:gd name="connsiteX8" fmla="*/ 1401179 w 1401179"/>
+              <a:gd name="connsiteY8" fmla="*/ 709613 h 852488"/>
+              <a:gd name="connsiteX9" fmla="*/ 1258304 w 1401179"/>
+              <a:gd name="connsiteY9" fmla="*/ 852488 h 852488"/>
+              <a:gd name="connsiteX10" fmla="*/ 1115429 w 1401179"/>
+              <a:gd name="connsiteY10" fmla="*/ 709613 h 852488"/>
+              <a:gd name="connsiteX11" fmla="*/ 1115429 w 1401179"/>
+              <a:gd name="connsiteY11" fmla="*/ 285750 h 852488"/>
+              <a:gd name="connsiteX12" fmla="*/ 142875 w 1401179"/>
+              <a:gd name="connsiteY12" fmla="*/ 285750 h 852488"/>
+              <a:gd name="connsiteX13" fmla="*/ 41847 w 1401179"/>
+              <a:gd name="connsiteY13" fmla="*/ 243903 h 852488"/>
+            </a:gdLst>
+            <a:ahLst/>
+            <a:cxnLst>
+              <a:cxn ang="0">
+                <a:pos x="connsiteX0" y="connsiteY0"/>
+              </a:cxn>
+              <a:cxn ang="0">
+                <a:pos x="connsiteX1" y="connsiteY1"/>
+              </a:cxn>
+              <a:cxn ang="0">
+                <a:pos x="connsiteX2" y="connsiteY2"/>
+              </a:cxn>
+              <a:cxn ang="0">
+                <a:pos x="connsiteX3" y="connsiteY3"/>
+              </a:cxn>
+              <a:cxn ang="0">
+                <a:pos x="connsiteX4" y="connsiteY4"/>
+              </a:cxn>
+              <a:cxn ang="0">
+                <a:pos x="connsiteX5" y="connsiteY5"/>
+              </a:cxn>
+              <a:cxn ang="0">
+                <a:pos x="connsiteX6" y="connsiteY6"/>
+              </a:cxn>
+              <a:cxn ang="0">
+                <a:pos x="connsiteX7" y="connsiteY7"/>
+              </a:cxn>
+              <a:cxn ang="0">
+                <a:pos x="connsiteX8" y="connsiteY8"/>
+              </a:cxn>
+              <a:cxn ang="0">
+                <a:pos x="connsiteX9" y="connsiteY9"/>
+              </a:cxn>
+              <a:cxn ang="0">
+                <a:pos x="connsiteX10" y="connsiteY10"/>
+              </a:cxn>
+              <a:cxn ang="0">
+                <a:pos x="connsiteX11" y="connsiteY11"/>
+              </a:cxn>
+              <a:cxn ang="0">
+                <a:pos x="connsiteX12" y="connsiteY12"/>
+              </a:cxn>
+              <a:cxn ang="0">
+                <a:pos x="connsiteX13" y="connsiteY13"/>
+              </a:cxn>
+            </a:cxnLst>
+            <a:rect l="l" t="t" r="r" b="b"/>
+            <a:pathLst>
+              <a:path w="1401179" h="852488">
+                <a:moveTo>
+                  <a:pt x="41847" y="243903"/>
+                </a:moveTo>
+                <a:cubicBezTo>
+                  <a:pt x="15992" y="218048"/>
+                  <a:pt x="0" y="182329"/>
+                  <a:pt x="0" y="142875"/>
+                </a:cubicBezTo>
+                <a:cubicBezTo>
+                  <a:pt x="0" y="63967"/>
+                  <a:pt x="63967" y="0"/>
+                  <a:pt x="142875" y="0"/>
+                </a:cubicBezTo>
+                <a:lnTo>
+                  <a:pt x="1256718" y="0"/>
+                </a:lnTo>
+                <a:cubicBezTo>
+                  <a:pt x="1296172" y="0"/>
+                  <a:pt x="1331891" y="15992"/>
+                  <a:pt x="1357746" y="41847"/>
+                </a:cubicBezTo>
+                <a:lnTo>
+                  <a:pt x="1358387" y="42798"/>
+                </a:lnTo>
+                <a:lnTo>
+                  <a:pt x="1359332" y="43435"/>
+                </a:lnTo>
+                <a:cubicBezTo>
+                  <a:pt x="1385188" y="69290"/>
+                  <a:pt x="1401179" y="105009"/>
+                  <a:pt x="1401179" y="144463"/>
+                </a:cubicBezTo>
+                <a:lnTo>
+                  <a:pt x="1401179" y="709613"/>
+                </a:lnTo>
+                <a:cubicBezTo>
+                  <a:pt x="1401179" y="788521"/>
+                  <a:pt x="1337212" y="852488"/>
+                  <a:pt x="1258304" y="852488"/>
+                </a:cubicBezTo>
+                <a:cubicBezTo>
+                  <a:pt x="1179396" y="852488"/>
+                  <a:pt x="1115429" y="788521"/>
+                  <a:pt x="1115429" y="709613"/>
+                </a:cubicBezTo>
+                <a:lnTo>
+                  <a:pt x="1115429" y="285750"/>
+                </a:lnTo>
+                <a:lnTo>
+                  <a:pt x="142875" y="285750"/>
+                </a:lnTo>
+                <a:cubicBezTo>
+                  <a:pt x="103421" y="285750"/>
+                  <a:pt x="67702" y="269758"/>
+                  <a:pt x="41847" y="243903"/>
+                </a:cubicBezTo>
+                <a:close/>
+              </a:path>
+            </a:pathLst>
+          </a:custGeom>
+          <a:solidFill>
+            <a:schemeClr val="bg1"/>
+          </a:solidFill>
+          <a:ln>
+            <a:solidFill>
+              <a:schemeClr val="tx1"/>
+            </a:solidFill>
+          </a:ln>
+        </p:spPr>
+        <p:style>
+          <a:lnRef idx="2">
+            <a:schemeClr val="accent1">
+              <a:shade val="50000"/>
+            </a:schemeClr>
+          </a:lnRef>
+          <a:fillRef idx="1">
+            <a:schemeClr val="accent1"/>
+          </a:fillRef>
+          <a:effectRef idx="0">
+            <a:schemeClr val="accent1"/>
+          </a:effectRef>
+          <a:fontRef idx="minor">
+            <a:schemeClr val="lt1"/>
+          </a:fontRef>
+        </p:style>
+        <p:txBody>
+          <a:bodyPr wrap="square" rtlCol="0" anchor="ctr">
+            <a:noAutofit/>
+          </a:bodyPr>
+          <a:lstStyle/>
+          <a:p>
+            <a:pPr algn="ctr"/>
+            <a:endParaRPr lang="zh-CN" altLang="en-US"/>
+          </a:p>
+        </p:txBody>
+      </p:sp>
+      <p:sp>
+        <p:nvSpPr>
+          <p:cNvPr id="28" name="矩形: 圆角 27">
+            <a:extLst>
+              <a:ext uri="{FF2B5EF4-FFF2-40B4-BE49-F238E27FC236}">
+                <a16:creationId xmlns:a16="http://schemas.microsoft.com/office/drawing/2014/main" id="{227E27D7-25BD-4808-8A88-B4FF240C2B22}"/>
+              </a:ext>
+            </a:extLst>
+          </p:cNvPr>
+          <p:cNvSpPr/>
+          <p:nvPr/>
+        </p:nvSpPr>
+        <p:spPr>
+          <a:xfrm>
+            <a:off x="6444339" y="1618343"/>
+            <a:ext cx="2801257" cy="3069772"/>
+          </a:xfrm>
+          <a:prstGeom prst="roundRect">
+            <a:avLst>
+              <a:gd name="adj" fmla="val 5009"/>
+            </a:avLst>
+          </a:prstGeom>
+          <a:solidFill>
+            <a:srgbClr val="920000"/>
+          </a:solidFill>
+          <a:ln w="44450">
+            <a:solidFill>
+              <a:srgbClr val="FF0000"/>
+            </a:solidFill>
+          </a:ln>
+        </p:spPr>
+        <p:style>
+          <a:lnRef idx="2">
+            <a:schemeClr val="accent1">
+              <a:shade val="50000"/>
+            </a:schemeClr>
+          </a:lnRef>
+          <a:fillRef idx="1">
+            <a:schemeClr val="accent1"/>
+          </a:fillRef>
+          <a:effectRef idx="0">
+            <a:schemeClr val="accent1"/>
+          </a:effectRef>
+          <a:fontRef idx="minor">
+            <a:schemeClr val="lt1"/>
+          </a:fontRef>
+        </p:style>
+        <p:txBody>
+          <a:bodyPr rtlCol="0" anchor="ctr"/>
+          <a:lstStyle/>
+          <a:p>
+            <a:pPr algn="ctr"/>
+            <a:endParaRPr lang="zh-CN" altLang="en-US"/>
+          </a:p>
+        </p:txBody>
+      </p:sp>
+      <p:sp>
+        <p:nvSpPr>
+          <p:cNvPr id="32" name="文本框 31">
+            <a:extLst>
+              <a:ext uri="{FF2B5EF4-FFF2-40B4-BE49-F238E27FC236}">
+                <a16:creationId xmlns:a16="http://schemas.microsoft.com/office/drawing/2014/main" id="{33506E88-86A8-451C-899B-CF45F12BAE9C}"/>
+              </a:ext>
+            </a:extLst>
+          </p:cNvPr>
+          <p:cNvSpPr txBox="1"/>
+          <p:nvPr/>
+        </p:nvSpPr>
+        <p:spPr>
+          <a:xfrm>
+            <a:off x="6734621" y="3852876"/>
+            <a:ext cx="2300518" cy="646331"/>
+          </a:xfrm>
+          <a:prstGeom prst="rect">
+            <a:avLst/>
+          </a:prstGeom>
+          <a:noFill/>
+        </p:spPr>
+        <p:txBody>
+          <a:bodyPr wrap="square" rtlCol="0">
+            <a:spAutoFit/>
+          </a:bodyPr>
+          <a:lstStyle/>
+          <a:p>
+            <a:pPr algn="ctr"/>
+            <a:r>
+              <a:rPr lang="en-US" altLang="zh-CN" sz="3600" b="1" dirty="0">
+                <a:solidFill>
+                  <a:schemeClr val="bg1"/>
+                </a:solidFill>
+                <a:latin typeface="Agency FB" panose="020B0503020202020204" pitchFamily="34" charset="0"/>
+              </a:rPr>
+              <a:t>Hard Mode</a:t>
+            </a:r>
+            <a:endParaRPr lang="zh-CN" altLang="en-US" sz="3600" b="1" dirty="0">
+              <a:solidFill>
+                <a:schemeClr val="bg1"/>
+              </a:solidFill>
+              <a:latin typeface="Agency FB" panose="020B0503020202020204" pitchFamily="34" charset="0"/>
+            </a:endParaRPr>
+          </a:p>
+        </p:txBody>
+      </p:sp>
+      <p:sp>
+        <p:nvSpPr>
+          <p:cNvPr id="27" name="任意多边形: 形状 26">
+            <a:extLst>
+              <a:ext uri="{FF2B5EF4-FFF2-40B4-BE49-F238E27FC236}">
+                <a16:creationId xmlns:a16="http://schemas.microsoft.com/office/drawing/2014/main" id="{21F49129-66BA-4AB0-9A8D-E35EDF79B345}"/>
+              </a:ext>
+            </a:extLst>
+          </p:cNvPr>
+          <p:cNvSpPr/>
+          <p:nvPr/>
+        </p:nvSpPr>
+        <p:spPr>
+          <a:xfrm>
+            <a:off x="7066607" y="2231825"/>
+            <a:ext cx="1556719" cy="1334808"/>
+          </a:xfrm>
+          <a:custGeom>
+            <a:avLst/>
+            <a:gdLst>
+              <a:gd name="connsiteX0" fmla="*/ 788333 w 1556719"/>
+              <a:gd name="connsiteY0" fmla="*/ 95917 h 1334808"/>
+              <a:gd name="connsiteX1" fmla="*/ 224216 w 1556719"/>
+              <a:gd name="connsiteY1" fmla="*/ 555686 h 1334808"/>
+              <a:gd name="connsiteX2" fmla="*/ 216932 w 1556719"/>
+              <a:gd name="connsiteY2" fmla="*/ 627935 h 1334808"/>
+              <a:gd name="connsiteX3" fmla="*/ 612358 w 1556719"/>
+              <a:gd name="connsiteY3" fmla="*/ 856235 h 1334808"/>
+              <a:gd name="connsiteX4" fmla="*/ 577897 w 1556719"/>
+              <a:gd name="connsiteY4" fmla="*/ 902329 h 1334808"/>
+              <a:gd name="connsiteX5" fmla="*/ 343843 w 1556719"/>
+              <a:gd name="connsiteY5" fmla="*/ 985269 h 1334808"/>
+              <a:gd name="connsiteX6" fmla="*/ 303012 w 1556719"/>
+              <a:gd name="connsiteY6" fmla="*/ 979222 h 1334808"/>
+              <a:gd name="connsiteX7" fmla="*/ 310858 w 1556719"/>
+              <a:gd name="connsiteY7" fmla="*/ 993677 h 1334808"/>
+              <a:gd name="connsiteX8" fmla="*/ 788333 w 1556719"/>
+              <a:gd name="connsiteY8" fmla="*/ 1247549 h 1334808"/>
+              <a:gd name="connsiteX9" fmla="*/ 1352451 w 1556719"/>
+              <a:gd name="connsiteY9" fmla="*/ 787780 h 1334808"/>
+              <a:gd name="connsiteX10" fmla="*/ 1362391 w 1556719"/>
+              <a:gd name="connsiteY10" fmla="*/ 689175 h 1334808"/>
+              <a:gd name="connsiteX11" fmla="*/ 1343141 w 1556719"/>
+              <a:gd name="connsiteY11" fmla="*/ 710575 h 1334808"/>
+              <a:gd name="connsiteX12" fmla="*/ 793409 w 1556719"/>
+              <a:gd name="connsiteY12" fmla="*/ 899421 h 1334808"/>
+              <a:gd name="connsiteX13" fmla="*/ 740207 w 1556719"/>
+              <a:gd name="connsiteY13" fmla="*/ 861535 h 1334808"/>
+              <a:gd name="connsiteX14" fmla="*/ 1259545 w 1556719"/>
+              <a:gd name="connsiteY14" fmla="*/ 342197 h 1334808"/>
+              <a:gd name="connsiteX15" fmla="*/ 1195497 w 1556719"/>
+              <a:gd name="connsiteY15" fmla="*/ 264570 h 1334808"/>
+              <a:gd name="connsiteX16" fmla="*/ 788333 w 1556719"/>
+              <a:gd name="connsiteY16" fmla="*/ 95917 h 1334808"/>
+              <a:gd name="connsiteX17" fmla="*/ 788333 w 1556719"/>
+              <a:gd name="connsiteY17" fmla="*/ 0 h 1334808"/>
+              <a:gd name="connsiteX18" fmla="*/ 1260259 w 1556719"/>
+              <a:gd name="connsiteY18" fmla="*/ 195478 h 1334808"/>
+              <a:gd name="connsiteX19" fmla="*/ 1326264 w 1556719"/>
+              <a:gd name="connsiteY19" fmla="*/ 275477 h 1334808"/>
+              <a:gd name="connsiteX20" fmla="*/ 1494102 w 1556719"/>
+              <a:gd name="connsiteY20" fmla="*/ 107640 h 1334808"/>
+              <a:gd name="connsiteX21" fmla="*/ 1531987 w 1556719"/>
+              <a:gd name="connsiteY21" fmla="*/ 160842 h 1334808"/>
+              <a:gd name="connsiteX22" fmla="*/ 1459035 w 1556719"/>
+              <a:gd name="connsiteY22" fmla="*/ 567255 h 1334808"/>
+              <a:gd name="connsiteX23" fmla="*/ 1447284 w 1556719"/>
+              <a:gd name="connsiteY23" fmla="*/ 583548 h 1334808"/>
+              <a:gd name="connsiteX24" fmla="*/ 1455737 w 1556719"/>
+              <a:gd name="connsiteY24" fmla="*/ 667404 h 1334808"/>
+              <a:gd name="connsiteX25" fmla="*/ 788333 w 1556719"/>
+              <a:gd name="connsiteY25" fmla="*/ 1334808 h 1334808"/>
+              <a:gd name="connsiteX26" fmla="*/ 234911 w 1556719"/>
+              <a:gd name="connsiteY26" fmla="*/ 1040556 h 1334808"/>
+              <a:gd name="connsiteX27" fmla="*/ 174729 w 1556719"/>
+              <a:gd name="connsiteY27" fmla="*/ 929679 h 1334808"/>
+              <a:gd name="connsiteX28" fmla="*/ 89830 w 1556719"/>
+              <a:gd name="connsiteY28" fmla="*/ 862128 h 1334808"/>
+              <a:gd name="connsiteX29" fmla="*/ 10217 w 1556719"/>
+              <a:gd name="connsiteY29" fmla="*/ 574579 h 1334808"/>
+              <a:gd name="connsiteX30" fmla="*/ 32905 w 1556719"/>
+              <a:gd name="connsiteY30" fmla="*/ 521688 h 1334808"/>
+              <a:gd name="connsiteX31" fmla="*/ 129969 w 1556719"/>
+              <a:gd name="connsiteY31" fmla="*/ 577727 h 1334808"/>
+              <a:gd name="connsiteX32" fmla="*/ 134489 w 1556719"/>
+              <a:gd name="connsiteY32" fmla="*/ 532899 h 1334808"/>
+              <a:gd name="connsiteX33" fmla="*/ 788333 w 1556719"/>
+              <a:gd name="connsiteY33" fmla="*/ 0 h 1334808"/>
+            </a:gdLst>
+            <a:ahLst/>
+            <a:cxnLst>
+              <a:cxn ang="0">
+                <a:pos x="connsiteX0" y="connsiteY0"/>
+              </a:cxn>
+              <a:cxn ang="0">
+                <a:pos x="connsiteX1" y="connsiteY1"/>
+              </a:cxn>
+              <a:cxn ang="0">
+                <a:pos x="connsiteX2" y="connsiteY2"/>
+              </a:cxn>
+              <a:cxn ang="0">
+                <a:pos x="connsiteX3" y="connsiteY3"/>
+              </a:cxn>
+              <a:cxn ang="0">
+                <a:pos x="connsiteX4" y="connsiteY4"/>
+              </a:cxn>
+              <a:cxn ang="0">
+                <a:pos x="connsiteX5" y="connsiteY5"/>
+              </a:cxn>
+              <a:cxn ang="0">
+                <a:pos x="connsiteX6" y="connsiteY6"/>
+              </a:cxn>
+              <a:cxn ang="0">
+                <a:pos x="connsiteX7" y="connsiteY7"/>
+              </a:cxn>
+              <a:cxn ang="0">
+                <a:pos x="connsiteX8" y="connsiteY8"/>
+              </a:cxn>
+              <a:cxn ang="0">
+                <a:pos x="connsiteX9" y="connsiteY9"/>
+              </a:cxn>
+              <a:cxn ang="0">
+                <a:pos x="connsiteX10" y="connsiteY10"/>
+              </a:cxn>
+              <a:cxn ang="0">
+                <a:pos x="connsiteX11" y="connsiteY11"/>
+              </a:cxn>
+              <a:cxn ang="0">
+                <a:pos x="connsiteX12" y="connsiteY12"/>
+              </a:cxn>
+              <a:cxn ang="0">
+                <a:pos x="connsiteX13" y="connsiteY13"/>
+              </a:cxn>
+              <a:cxn ang="0">
+                <a:pos x="connsiteX14" y="connsiteY14"/>
+              </a:cxn>
+              <a:cxn ang="0">
+                <a:pos x="connsiteX15" y="connsiteY15"/>
+              </a:cxn>
+              <a:cxn ang="0">
+                <a:pos x="connsiteX16" y="connsiteY16"/>
+              </a:cxn>
+              <a:cxn ang="0">
+                <a:pos x="connsiteX17" y="connsiteY17"/>
+              </a:cxn>
+              <a:cxn ang="0">
+                <a:pos x="connsiteX18" y="connsiteY18"/>
+              </a:cxn>
+              <a:cxn ang="0">
+                <a:pos x="connsiteX19" y="connsiteY19"/>
+              </a:cxn>
+              <a:cxn ang="0">
+                <a:pos x="connsiteX20" y="connsiteY20"/>
+              </a:cxn>
+              <a:cxn ang="0">
+                <a:pos x="connsiteX21" y="connsiteY21"/>
+              </a:cxn>
+              <a:cxn ang="0">
+                <a:pos x="connsiteX22" y="connsiteY22"/>
+              </a:cxn>
+              <a:cxn ang="0">
+                <a:pos x="connsiteX23" y="connsiteY23"/>
+              </a:cxn>
+              <a:cxn ang="0">
+                <a:pos x="connsiteX24" y="connsiteY24"/>
+              </a:cxn>
+              <a:cxn ang="0">
+                <a:pos x="connsiteX25" y="connsiteY25"/>
+              </a:cxn>
+              <a:cxn ang="0">
+                <a:pos x="connsiteX26" y="connsiteY26"/>
+              </a:cxn>
+              <a:cxn ang="0">
+                <a:pos x="connsiteX27" y="connsiteY27"/>
+              </a:cxn>
+              <a:cxn ang="0">
+                <a:pos x="connsiteX28" y="connsiteY28"/>
+              </a:cxn>
+              <a:cxn ang="0">
+                <a:pos x="connsiteX29" y="connsiteY29"/>
+              </a:cxn>
+              <a:cxn ang="0">
+                <a:pos x="connsiteX30" y="connsiteY30"/>
+              </a:cxn>
+              <a:cxn ang="0">
+                <a:pos x="connsiteX31" y="connsiteY31"/>
+              </a:cxn>
+              <a:cxn ang="0">
+                <a:pos x="connsiteX32" y="connsiteY32"/>
+              </a:cxn>
+              <a:cxn ang="0">
+                <a:pos x="connsiteX33" y="connsiteY33"/>
+              </a:cxn>
+            </a:cxnLst>
+            <a:rect l="l" t="t" r="r" b="b"/>
+            <a:pathLst>
+              <a:path w="1556719" h="1334808">
+                <a:moveTo>
+                  <a:pt x="788333" y="95917"/>
+                </a:moveTo>
+                <a:cubicBezTo>
+                  <a:pt x="510071" y="95917"/>
+                  <a:pt x="277909" y="293297"/>
+                  <a:pt x="224216" y="555686"/>
+                </a:cubicBezTo>
+                <a:lnTo>
+                  <a:pt x="216932" y="627935"/>
+                </a:lnTo>
+                <a:lnTo>
+                  <a:pt x="612358" y="856235"/>
+                </a:lnTo>
+                <a:lnTo>
+                  <a:pt x="577897" y="902329"/>
+                </a:lnTo>
+                <a:cubicBezTo>
+                  <a:pt x="520631" y="962523"/>
+                  <a:pt x="434540" y="991635"/>
+                  <a:pt x="343843" y="985269"/>
+                </a:cubicBezTo>
+                <a:lnTo>
+                  <a:pt x="303012" y="979222"/>
+                </a:lnTo>
+                <a:lnTo>
+                  <a:pt x="310858" y="993677"/>
+                </a:lnTo>
+                <a:cubicBezTo>
+                  <a:pt x="414336" y="1146845"/>
+                  <a:pt x="589575" y="1247549"/>
+                  <a:pt x="788333" y="1247549"/>
+                </a:cubicBezTo>
+                <a:cubicBezTo>
+                  <a:pt x="1066595" y="1247549"/>
+                  <a:pt x="1298758" y="1050169"/>
+                  <a:pt x="1352451" y="787780"/>
+                </a:cubicBezTo>
+                <a:lnTo>
+                  <a:pt x="1362391" y="689175"/>
+                </a:lnTo>
+                <a:lnTo>
+                  <a:pt x="1343141" y="710575"/>
+                </a:lnTo>
+                <a:cubicBezTo>
+                  <a:pt x="1160982" y="892734"/>
+                  <a:pt x="931536" y="967251"/>
+                  <a:pt x="793409" y="899421"/>
+                </a:cubicBezTo>
+                <a:lnTo>
+                  <a:pt x="740207" y="861535"/>
+                </a:lnTo>
+                <a:lnTo>
+                  <a:pt x="1259545" y="342197"/>
+                </a:lnTo>
+                <a:lnTo>
+                  <a:pt x="1195497" y="264570"/>
+                </a:lnTo>
+                <a:cubicBezTo>
+                  <a:pt x="1091294" y="160368"/>
+                  <a:pt x="947340" y="95917"/>
+                  <a:pt x="788333" y="95917"/>
+                </a:cubicBezTo>
+                <a:close/>
+                <a:moveTo>
+                  <a:pt x="788333" y="0"/>
+                </a:moveTo>
+                <a:cubicBezTo>
+                  <a:pt x="972632" y="0"/>
+                  <a:pt x="1139483" y="74702"/>
+                  <a:pt x="1260259" y="195478"/>
+                </a:cubicBezTo>
+                <a:lnTo>
+                  <a:pt x="1326264" y="275477"/>
+                </a:lnTo>
+                <a:lnTo>
+                  <a:pt x="1494102" y="107640"/>
+                </a:lnTo>
+                <a:lnTo>
+                  <a:pt x="1531987" y="160842"/>
+                </a:lnTo>
+                <a:cubicBezTo>
+                  <a:pt x="1582859" y="264438"/>
+                  <a:pt x="1553662" y="419400"/>
+                  <a:pt x="1459035" y="567255"/>
+                </a:cubicBezTo>
+                <a:lnTo>
+                  <a:pt x="1447284" y="583548"/>
+                </a:lnTo>
+                <a:lnTo>
+                  <a:pt x="1455737" y="667404"/>
+                </a:lnTo>
+                <a:cubicBezTo>
+                  <a:pt x="1455737" y="1036001"/>
+                  <a:pt x="1156930" y="1334808"/>
+                  <a:pt x="788333" y="1334808"/>
+                </a:cubicBezTo>
+                <a:cubicBezTo>
+                  <a:pt x="557960" y="1334808"/>
+                  <a:pt x="354849" y="1218087"/>
+                  <a:pt x="234911" y="1040556"/>
+                </a:cubicBezTo>
+                <a:lnTo>
+                  <a:pt x="174729" y="929679"/>
+                </a:lnTo>
+                <a:lnTo>
+                  <a:pt x="89830" y="862128"/>
+                </a:lnTo>
+                <a:cubicBezTo>
+                  <a:pt x="13341" y="779405"/>
+                  <a:pt x="-17979" y="670208"/>
+                  <a:pt x="10217" y="574579"/>
+                </a:cubicBezTo>
+                <a:lnTo>
+                  <a:pt x="32905" y="521688"/>
+                </a:lnTo>
+                <a:lnTo>
+                  <a:pt x="129969" y="577727"/>
+                </a:lnTo>
+                <a:lnTo>
+                  <a:pt x="134489" y="532899"/>
+                </a:lnTo>
+                <a:cubicBezTo>
+                  <a:pt x="196721" y="228774"/>
+                  <a:pt x="465811" y="0"/>
+                  <a:pt x="788333" y="0"/>
+                </a:cubicBezTo>
+                <a:close/>
+              </a:path>
+            </a:pathLst>
+          </a:custGeom>
+          <a:solidFill>
+            <a:schemeClr val="bg1"/>
+          </a:solidFill>
+          <a:ln w="12700">
+            <a:solidFill>
+              <a:schemeClr val="tx1"/>
+            </a:solidFill>
+          </a:ln>
+        </p:spPr>
+        <p:style>
+          <a:lnRef idx="2">
+            <a:schemeClr val="accent1">
+              <a:shade val="50000"/>
+            </a:schemeClr>
+          </a:lnRef>
+          <a:fillRef idx="1">
+            <a:schemeClr val="accent1"/>
+          </a:fillRef>
+          <a:effectRef idx="0">
+            <a:schemeClr val="accent1"/>
+          </a:effectRef>
+          <a:fontRef idx="minor">
+            <a:schemeClr val="lt1"/>
+          </a:fontRef>
+        </p:style>
+        <p:txBody>
+          <a:bodyPr wrap="square" rtlCol="0" anchor="ctr">
+            <a:noAutofit/>
+          </a:bodyPr>
+          <a:lstStyle/>
+          <a:p>
+            <a:pPr algn="ctr"/>
+            <a:endParaRPr lang="zh-CN" altLang="en-US"/>
+          </a:p>
+        </p:txBody>
+      </p:sp>
+      <p:sp>
+        <p:nvSpPr>
+          <p:cNvPr id="37" name="文本框 36">
+            <a:extLst>
+              <a:ext uri="{FF2B5EF4-FFF2-40B4-BE49-F238E27FC236}">
+                <a16:creationId xmlns:a16="http://schemas.microsoft.com/office/drawing/2014/main" id="{2A5A28D2-B6B9-44DF-B0A7-DAAE383A1EBD}"/>
+              </a:ext>
+            </a:extLst>
+          </p:cNvPr>
+          <p:cNvSpPr txBox="1"/>
+          <p:nvPr/>
+        </p:nvSpPr>
+        <p:spPr>
+          <a:xfrm>
+            <a:off x="6747052" y="4788825"/>
+            <a:ext cx="2300518" cy="646331"/>
+          </a:xfrm>
+          <a:prstGeom prst="rect">
+            <a:avLst/>
+          </a:prstGeom>
+          <a:noFill/>
+        </p:spPr>
+        <p:txBody>
+          <a:bodyPr wrap="square" rtlCol="0">
+            <a:spAutoFit/>
+          </a:bodyPr>
+          <a:lstStyle/>
+          <a:p>
+            <a:pPr algn="ctr"/>
+            <a:r>
+              <a:rPr lang="en-US" altLang="zh-CN" sz="3600" b="1" dirty="0">
+                <a:solidFill>
+                  <a:schemeClr val="bg1"/>
+                </a:solidFill>
+                <a:latin typeface="Agency FB" panose="020B0503020202020204" pitchFamily="34" charset="0"/>
+              </a:rPr>
+              <a:t>[ E ]</a:t>
+            </a:r>
+            <a:endParaRPr lang="zh-CN" altLang="en-US" sz="3600" b="1" dirty="0">
+              <a:solidFill>
+                <a:schemeClr val="bg1"/>
+              </a:solidFill>
+              <a:latin typeface="Agency FB" panose="020B0503020202020204" pitchFamily="34" charset="0"/>
+            </a:endParaRPr>
+          </a:p>
+        </p:txBody>
+      </p:sp>
+    </p:spTree>
+    <p:extLst>
+      <p:ext uri="{BB962C8B-B14F-4D97-AF65-F5344CB8AC3E}">
+        <p14:creationId xmlns:p14="http://schemas.microsoft.com/office/powerpoint/2010/main" val="201126237"/>
+      </p:ext>
+    </p:extLst>
+  </p:cSld>
+  <p:clrMapOvr>
+    <a:masterClrMapping/>
+  </p:clrMapOvr>
+</p:sld>
+</file>
+
+<file path=ppt/slides/slide6.xml><?xml version="1.0" encoding="utf-8"?>
 <p:sld xmlns:a="http://schemas.openxmlformats.org/drawingml/2006/main" xmlns:r="http://schemas.openxmlformats.org/officeDocument/2006/relationships" xmlns:p="http://schemas.openxmlformats.org/presentationml/2006/main">
   <p:cSld>
     <p:bg>

--- a/UI.pptx
+++ b/UI.pptx
@@ -264,7 +264,7 @@
           <a:p>
             <a:fld id="{FB319278-4D27-4CFE-9D56-B1AA2F1EEA35}" type="datetimeFigureOut">
               <a:rPr lang="zh-CN" altLang="en-US" smtClean="0"/>
-              <a:t>2025/10/9</a:t>
+              <a:t>2026/5/5</a:t>
             </a:fld>
             <a:endParaRPr lang="zh-CN" altLang="en-US"/>
           </a:p>
@@ -462,7 +462,7 @@
           <a:p>
             <a:fld id="{FB319278-4D27-4CFE-9D56-B1AA2F1EEA35}" type="datetimeFigureOut">
               <a:rPr lang="zh-CN" altLang="en-US" smtClean="0"/>
-              <a:t>2025/10/9</a:t>
+              <a:t>2026/5/5</a:t>
             </a:fld>
             <a:endParaRPr lang="zh-CN" altLang="en-US"/>
           </a:p>
@@ -670,7 +670,7 @@
           <a:p>
             <a:fld id="{FB319278-4D27-4CFE-9D56-B1AA2F1EEA35}" type="datetimeFigureOut">
               <a:rPr lang="zh-CN" altLang="en-US" smtClean="0"/>
-              <a:t>2025/10/9</a:t>
+              <a:t>2026/5/5</a:t>
             </a:fld>
             <a:endParaRPr lang="zh-CN" altLang="en-US"/>
           </a:p>
@@ -868,7 +868,7 @@
           <a:p>
             <a:fld id="{FB319278-4D27-4CFE-9D56-B1AA2F1EEA35}" type="datetimeFigureOut">
               <a:rPr lang="zh-CN" altLang="en-US" smtClean="0"/>
-              <a:t>2025/10/9</a:t>
+              <a:t>2026/5/5</a:t>
             </a:fld>
             <a:endParaRPr lang="zh-CN" altLang="en-US"/>
           </a:p>
@@ -1143,7 +1143,7 @@
           <a:p>
             <a:fld id="{FB319278-4D27-4CFE-9D56-B1AA2F1EEA35}" type="datetimeFigureOut">
               <a:rPr lang="zh-CN" altLang="en-US" smtClean="0"/>
-              <a:t>2025/10/9</a:t>
+              <a:t>2026/5/5</a:t>
             </a:fld>
             <a:endParaRPr lang="zh-CN" altLang="en-US"/>
           </a:p>
@@ -1408,7 +1408,7 @@
           <a:p>
             <a:fld id="{FB319278-4D27-4CFE-9D56-B1AA2F1EEA35}" type="datetimeFigureOut">
               <a:rPr lang="zh-CN" altLang="en-US" smtClean="0"/>
-              <a:t>2025/10/9</a:t>
+              <a:t>2026/5/5</a:t>
             </a:fld>
             <a:endParaRPr lang="zh-CN" altLang="en-US"/>
           </a:p>
@@ -1820,7 +1820,7 @@
           <a:p>
             <a:fld id="{FB319278-4D27-4CFE-9D56-B1AA2F1EEA35}" type="datetimeFigureOut">
               <a:rPr lang="zh-CN" altLang="en-US" smtClean="0"/>
-              <a:t>2025/10/9</a:t>
+              <a:t>2026/5/5</a:t>
             </a:fld>
             <a:endParaRPr lang="zh-CN" altLang="en-US"/>
           </a:p>
@@ -1961,7 +1961,7 @@
           <a:p>
             <a:fld id="{FB319278-4D27-4CFE-9D56-B1AA2F1EEA35}" type="datetimeFigureOut">
               <a:rPr lang="zh-CN" altLang="en-US" smtClean="0"/>
-              <a:t>2025/10/9</a:t>
+              <a:t>2026/5/5</a:t>
             </a:fld>
             <a:endParaRPr lang="zh-CN" altLang="en-US"/>
           </a:p>
@@ -2074,7 +2074,7 @@
           <a:p>
             <a:fld id="{FB319278-4D27-4CFE-9D56-B1AA2F1EEA35}" type="datetimeFigureOut">
               <a:rPr lang="zh-CN" altLang="en-US" smtClean="0"/>
-              <a:t>2025/10/9</a:t>
+              <a:t>2026/5/5</a:t>
             </a:fld>
             <a:endParaRPr lang="zh-CN" altLang="en-US"/>
           </a:p>
@@ -2385,7 +2385,7 @@
           <a:p>
             <a:fld id="{FB319278-4D27-4CFE-9D56-B1AA2F1EEA35}" type="datetimeFigureOut">
               <a:rPr lang="zh-CN" altLang="en-US" smtClean="0"/>
-              <a:t>2025/10/9</a:t>
+              <a:t>2026/5/5</a:t>
             </a:fld>
             <a:endParaRPr lang="zh-CN" altLang="en-US"/>
           </a:p>
@@ -2673,7 +2673,7 @@
           <a:p>
             <a:fld id="{FB319278-4D27-4CFE-9D56-B1AA2F1EEA35}" type="datetimeFigureOut">
               <a:rPr lang="zh-CN" altLang="en-US" smtClean="0"/>
-              <a:t>2025/10/9</a:t>
+              <a:t>2026/5/5</a:t>
             </a:fld>
             <a:endParaRPr lang="zh-CN" altLang="en-US"/>
           </a:p>
@@ -2919,7 +2919,7 @@
           <a:p>
             <a:fld id="{FB319278-4D27-4CFE-9D56-B1AA2F1EEA35}" type="datetimeFigureOut">
               <a:rPr lang="zh-CN" altLang="en-US" smtClean="0"/>
-              <a:t>2025/10/9</a:t>
+              <a:t>2026/5/5</a:t>
             </a:fld>
             <a:endParaRPr lang="zh-CN" altLang="en-US"/>
           </a:p>
@@ -5916,7 +5916,7 @@
         </p:nvSpPr>
         <p:spPr>
           <a:xfrm>
-            <a:off x="2438396" y="4796970"/>
+            <a:off x="2438396" y="4788825"/>
             <a:ext cx="2300518" cy="646331"/>
           </a:xfrm>
           <a:prstGeom prst="rect">
@@ -5938,7 +5938,7 @@
                 </a:solidFill>
                 <a:latin typeface="Agency FB" panose="020B0503020202020204" pitchFamily="34" charset="0"/>
               </a:rPr>
-              <a:t>[ Q ]</a:t>
+              <a:t>[    ]</a:t>
             </a:r>
             <a:endParaRPr lang="zh-CN" altLang="en-US" sz="3600" b="1" dirty="0">
               <a:solidFill>
@@ -5985,7 +5985,7 @@
                 </a:solidFill>
                 <a:latin typeface="Agency FB" panose="020B0503020202020204" pitchFamily="34" charset="0"/>
               </a:rPr>
-              <a:t>[ E ]</a:t>
+              <a:t>[    ]</a:t>
             </a:r>
             <a:endParaRPr lang="zh-CN" altLang="en-US" sz="3600" b="1" dirty="0">
               <a:solidFill>
@@ -6361,7 +6361,7 @@
                 </a:solidFill>
                 <a:latin typeface="Agency FB" panose="020B0503020202020204" pitchFamily="34" charset="0"/>
               </a:rPr>
-              <a:t>[ Q ]</a:t>
+              <a:t>[    ]</a:t>
             </a:r>
             <a:endParaRPr lang="zh-CN" altLang="en-US" sz="3600" b="1" dirty="0">
               <a:solidFill>
@@ -7412,7 +7412,7 @@
                 </a:solidFill>
                 <a:latin typeface="Agency FB" panose="020B0503020202020204" pitchFamily="34" charset="0"/>
               </a:rPr>
-              <a:t>[ E ]</a:t>
+              <a:t>[    ]</a:t>
             </a:r>
             <a:endParaRPr lang="zh-CN" altLang="en-US" sz="3600" b="1" dirty="0">
               <a:solidFill>
